--- a/docs/pptx/whole/ritu-linsubhr-ratio-hosp10.pptx
+++ b/docs/pptx/whole/ritu-linsubhr-ratio-hosp10.pptx
@@ -2443,7 +2443,7 @@
           </p:nvSpPr>
           <p:spPr>
             <a:xfrm>
-              <a:off x="1424129" y="2073503"/>
+              <a:off x="1425728" y="2073503"/>
               <a:ext cx="0" cy="3649639"/>
             </a:xfrm>
             <a:custGeom>
@@ -2486,7 +2486,7 @@
           </p:nvSpPr>
           <p:spPr>
             <a:xfrm>
-              <a:off x="3298684" y="2073503"/>
+              <a:off x="3298283" y="2073503"/>
               <a:ext cx="0" cy="3649639"/>
             </a:xfrm>
             <a:custGeom>
@@ -2529,7 +2529,7 @@
           </p:nvSpPr>
           <p:spPr>
             <a:xfrm>
-              <a:off x="5173239" y="2073503"/>
+              <a:off x="5170839" y="2073503"/>
               <a:ext cx="0" cy="3649639"/>
             </a:xfrm>
             <a:custGeom>
@@ -2572,7 +2572,7 @@
           </p:nvSpPr>
           <p:spPr>
             <a:xfrm>
-              <a:off x="7047795" y="2073503"/>
+              <a:off x="7043395" y="2073503"/>
               <a:ext cx="0" cy="3649639"/>
             </a:xfrm>
             <a:custGeom>
@@ -2830,7 +2830,7 @@
           </p:nvSpPr>
           <p:spPr>
             <a:xfrm>
-              <a:off x="2361407" y="2073503"/>
+              <a:off x="2362006" y="2073503"/>
               <a:ext cx="0" cy="3649639"/>
             </a:xfrm>
             <a:custGeom>
@@ -2873,7 +2873,7 @@
           </p:nvSpPr>
           <p:spPr>
             <a:xfrm>
-              <a:off x="4235962" y="2073503"/>
+              <a:off x="4234561" y="2073503"/>
               <a:ext cx="0" cy="3649639"/>
             </a:xfrm>
             <a:custGeom>
@@ -2916,7 +2916,7 @@
           </p:nvSpPr>
           <p:spPr>
             <a:xfrm>
-              <a:off x="6110517" y="2073503"/>
+              <a:off x="6107117" y="2073503"/>
               <a:ext cx="0" cy="3649639"/>
             </a:xfrm>
             <a:custGeom>
@@ -2959,7 +2959,7 @@
           </p:nvSpPr>
           <p:spPr>
             <a:xfrm>
-              <a:off x="7985072" y="2073503"/>
+              <a:off x="7979673" y="2073503"/>
               <a:ext cx="0" cy="3649639"/>
             </a:xfrm>
             <a:custGeom>
@@ -3003,584 +3003,584 @@
           <p:spPr>
             <a:xfrm>
               <a:off x="1172049" y="2073503"/>
-              <a:ext cx="7090630" cy="3279907"/>
+              <a:ext cx="7090630" cy="3280711"/>
             </a:xfrm>
             <a:custGeom>
               <a:avLst/>
               <a:pathLst>
-                <a:path w="7090630" h="3279907">
+                <a:path w="7090630" h="3280711">
                   <a:moveTo>
-                    <a:pt x="0" y="1092201"/>
+                    <a:pt x="0" y="1087956"/>
                   </a:moveTo>
                   <a:lnTo>
-                    <a:pt x="71622" y="1149245"/>
-                  </a:lnTo>
-                  <a:lnTo>
-                    <a:pt x="143245" y="1204928"/>
-                  </a:lnTo>
-                  <a:lnTo>
-                    <a:pt x="214867" y="1259282"/>
-                  </a:lnTo>
-                  <a:lnTo>
-                    <a:pt x="286490" y="1312340"/>
-                  </a:lnTo>
-                  <a:lnTo>
-                    <a:pt x="358112" y="1364133"/>
-                  </a:lnTo>
-                  <a:lnTo>
-                    <a:pt x="429735" y="1414690"/>
-                  </a:lnTo>
-                  <a:lnTo>
-                    <a:pt x="501357" y="1464042"/>
-                  </a:lnTo>
-                  <a:lnTo>
-                    <a:pt x="572980" y="1512216"/>
-                  </a:lnTo>
-                  <a:lnTo>
-                    <a:pt x="644602" y="1559241"/>
-                  </a:lnTo>
-                  <a:lnTo>
-                    <a:pt x="716225" y="1605144"/>
-                  </a:lnTo>
-                  <a:lnTo>
-                    <a:pt x="787847" y="1649953"/>
-                  </a:lnTo>
-                  <a:lnTo>
-                    <a:pt x="859470" y="1693693"/>
-                  </a:lnTo>
-                  <a:lnTo>
-                    <a:pt x="931092" y="1736389"/>
-                  </a:lnTo>
-                  <a:lnTo>
-                    <a:pt x="1002715" y="1778068"/>
-                  </a:lnTo>
-                  <a:lnTo>
-                    <a:pt x="1074337" y="1818752"/>
-                  </a:lnTo>
-                  <a:lnTo>
-                    <a:pt x="1145960" y="1858465"/>
-                  </a:lnTo>
-                  <a:lnTo>
-                    <a:pt x="1217582" y="1897232"/>
-                  </a:lnTo>
-                  <a:lnTo>
-                    <a:pt x="1289205" y="1935073"/>
-                  </a:lnTo>
-                  <a:lnTo>
-                    <a:pt x="1360827" y="1972012"/>
-                  </a:lnTo>
-                  <a:lnTo>
-                    <a:pt x="1432450" y="2008071"/>
-                  </a:lnTo>
-                  <a:lnTo>
-                    <a:pt x="1504073" y="2043269"/>
-                  </a:lnTo>
-                  <a:lnTo>
-                    <a:pt x="1575695" y="2077627"/>
-                  </a:lnTo>
-                  <a:lnTo>
-                    <a:pt x="1647318" y="2111166"/>
-                  </a:lnTo>
-                  <a:lnTo>
-                    <a:pt x="1718940" y="2143905"/>
-                  </a:lnTo>
-                  <a:lnTo>
-                    <a:pt x="1790563" y="2175863"/>
-                  </a:lnTo>
-                  <a:lnTo>
-                    <a:pt x="1862185" y="2207059"/>
-                  </a:lnTo>
-                  <a:lnTo>
-                    <a:pt x="1933808" y="2237510"/>
-                  </a:lnTo>
-                  <a:lnTo>
-                    <a:pt x="2005430" y="2267236"/>
-                  </a:lnTo>
-                  <a:lnTo>
-                    <a:pt x="2077053" y="2296252"/>
-                  </a:lnTo>
-                  <a:lnTo>
-                    <a:pt x="2148675" y="2324576"/>
-                  </a:lnTo>
-                  <a:lnTo>
-                    <a:pt x="2220298" y="2352225"/>
-                  </a:lnTo>
-                  <a:lnTo>
-                    <a:pt x="2291920" y="2379214"/>
-                  </a:lnTo>
-                  <a:lnTo>
-                    <a:pt x="2363543" y="2405560"/>
-                  </a:lnTo>
-                  <a:lnTo>
-                    <a:pt x="2435165" y="2431277"/>
-                  </a:lnTo>
-                  <a:lnTo>
-                    <a:pt x="2506788" y="2456380"/>
-                  </a:lnTo>
-                  <a:lnTo>
-                    <a:pt x="2578410" y="2480885"/>
-                  </a:lnTo>
-                  <a:lnTo>
-                    <a:pt x="2650033" y="2504805"/>
-                  </a:lnTo>
-                  <a:lnTo>
-                    <a:pt x="2721655" y="2528155"/>
-                  </a:lnTo>
-                  <a:lnTo>
-                    <a:pt x="2793278" y="2550948"/>
-                  </a:lnTo>
-                  <a:lnTo>
-                    <a:pt x="2864901" y="2573197"/>
-                  </a:lnTo>
-                  <a:lnTo>
-                    <a:pt x="2936523" y="2594916"/>
-                  </a:lnTo>
-                  <a:lnTo>
-                    <a:pt x="3008146" y="2616116"/>
-                  </a:lnTo>
-                  <a:lnTo>
-                    <a:pt x="3079768" y="2636811"/>
-                  </a:lnTo>
-                  <a:lnTo>
-                    <a:pt x="3151391" y="2650652"/>
-                  </a:lnTo>
-                  <a:lnTo>
-                    <a:pt x="3223013" y="2623565"/>
-                  </a:lnTo>
-                  <a:lnTo>
-                    <a:pt x="3294636" y="2595598"/>
-                  </a:lnTo>
-                  <a:lnTo>
-                    <a:pt x="3366258" y="2566721"/>
-                  </a:lnTo>
-                  <a:lnTo>
-                    <a:pt x="3437881" y="2536906"/>
-                  </a:lnTo>
-                  <a:lnTo>
-                    <a:pt x="3509503" y="2506121"/>
-                  </a:lnTo>
-                  <a:lnTo>
-                    <a:pt x="3581126" y="2474335"/>
-                  </a:lnTo>
-                  <a:lnTo>
-                    <a:pt x="3652748" y="2441516"/>
-                  </a:lnTo>
-                  <a:lnTo>
-                    <a:pt x="3724371" y="2407630"/>
-                  </a:lnTo>
-                  <a:lnTo>
-                    <a:pt x="3795993" y="2372642"/>
-                  </a:lnTo>
-                  <a:lnTo>
-                    <a:pt x="3867616" y="2336516"/>
-                  </a:lnTo>
-                  <a:lnTo>
-                    <a:pt x="3939238" y="2299216"/>
-                  </a:lnTo>
-                  <a:lnTo>
-                    <a:pt x="4010861" y="2260704"/>
-                  </a:lnTo>
-                  <a:lnTo>
-                    <a:pt x="4082483" y="2220939"/>
-                  </a:lnTo>
-                  <a:lnTo>
-                    <a:pt x="4154106" y="2179881"/>
-                  </a:lnTo>
-                  <a:lnTo>
-                    <a:pt x="4225729" y="2137488"/>
-                  </a:lnTo>
-                  <a:lnTo>
-                    <a:pt x="4297351" y="2093717"/>
-                  </a:lnTo>
-                  <a:lnTo>
-                    <a:pt x="4368974" y="2048522"/>
-                  </a:lnTo>
-                  <a:lnTo>
-                    <a:pt x="4440596" y="2001859"/>
-                  </a:lnTo>
-                  <a:lnTo>
-                    <a:pt x="4512219" y="1953678"/>
-                  </a:lnTo>
-                  <a:lnTo>
-                    <a:pt x="4583841" y="1903931"/>
-                  </a:lnTo>
-                  <a:lnTo>
-                    <a:pt x="4655464" y="1852566"/>
-                  </a:lnTo>
-                  <a:lnTo>
-                    <a:pt x="4727086" y="1799531"/>
-                  </a:lnTo>
-                  <a:lnTo>
-                    <a:pt x="4798709" y="1744772"/>
-                  </a:lnTo>
-                  <a:lnTo>
-                    <a:pt x="4870331" y="1688232"/>
-                  </a:lnTo>
-                  <a:lnTo>
-                    <a:pt x="4941954" y="1629854"/>
-                  </a:lnTo>
-                  <a:lnTo>
-                    <a:pt x="5013576" y="1569578"/>
-                  </a:lnTo>
-                  <a:lnTo>
-                    <a:pt x="5085199" y="1507343"/>
-                  </a:lnTo>
-                  <a:lnTo>
-                    <a:pt x="5156821" y="1443084"/>
-                  </a:lnTo>
-                  <a:lnTo>
-                    <a:pt x="5228444" y="1376735"/>
-                  </a:lnTo>
-                  <a:lnTo>
-                    <a:pt x="5300066" y="1308230"/>
-                  </a:lnTo>
-                  <a:lnTo>
-                    <a:pt x="5371689" y="1237497"/>
-                  </a:lnTo>
-                  <a:lnTo>
-                    <a:pt x="5443311" y="1164464"/>
-                  </a:lnTo>
-                  <a:lnTo>
-                    <a:pt x="5514934" y="1089057"/>
-                  </a:lnTo>
-                  <a:lnTo>
-                    <a:pt x="5586557" y="1011198"/>
-                  </a:lnTo>
-                  <a:lnTo>
-                    <a:pt x="5658179" y="930807"/>
-                  </a:lnTo>
-                  <a:lnTo>
-                    <a:pt x="5729802" y="847803"/>
-                  </a:lnTo>
-                  <a:lnTo>
-                    <a:pt x="5801424" y="762100"/>
-                  </a:lnTo>
-                  <a:lnTo>
-                    <a:pt x="5873047" y="673611"/>
-                  </a:lnTo>
-                  <a:lnTo>
-                    <a:pt x="5944669" y="582245"/>
-                  </a:lnTo>
-                  <a:lnTo>
-                    <a:pt x="6016292" y="487907"/>
-                  </a:lnTo>
-                  <a:lnTo>
-                    <a:pt x="6087914" y="390503"/>
-                  </a:lnTo>
-                  <a:lnTo>
-                    <a:pt x="6159537" y="289932"/>
-                  </a:lnTo>
-                  <a:lnTo>
-                    <a:pt x="6231159" y="186091"/>
-                  </a:lnTo>
-                  <a:lnTo>
-                    <a:pt x="6302782" y="78874"/>
-                  </a:lnTo>
-                  <a:lnTo>
-                    <a:pt x="6353812" y="0"/>
+                    <a:pt x="71622" y="1145191"/>
+                  </a:lnTo>
+                  <a:lnTo>
+                    <a:pt x="143245" y="1201058"/>
+                  </a:lnTo>
+                  <a:lnTo>
+                    <a:pt x="214867" y="1255591"/>
+                  </a:lnTo>
+                  <a:lnTo>
+                    <a:pt x="286490" y="1308821"/>
+                  </a:lnTo>
+                  <a:lnTo>
+                    <a:pt x="358112" y="1360779"/>
+                  </a:lnTo>
+                  <a:lnTo>
+                    <a:pt x="429735" y="1411496"/>
+                  </a:lnTo>
+                  <a:lnTo>
+                    <a:pt x="501357" y="1461001"/>
+                  </a:lnTo>
+                  <a:lnTo>
+                    <a:pt x="572980" y="1509324"/>
+                  </a:lnTo>
+                  <a:lnTo>
+                    <a:pt x="644602" y="1556492"/>
+                  </a:lnTo>
+                  <a:lnTo>
+                    <a:pt x="716225" y="1602534"/>
+                  </a:lnTo>
+                  <a:lnTo>
+                    <a:pt x="787847" y="1647475"/>
+                  </a:lnTo>
+                  <a:lnTo>
+                    <a:pt x="859470" y="1691343"/>
+                  </a:lnTo>
+                  <a:lnTo>
+                    <a:pt x="931092" y="1734163"/>
+                  </a:lnTo>
+                  <a:lnTo>
+                    <a:pt x="1002715" y="1775960"/>
+                  </a:lnTo>
+                  <a:lnTo>
+                    <a:pt x="1074337" y="1816759"/>
+                  </a:lnTo>
+                  <a:lnTo>
+                    <a:pt x="1145960" y="1856583"/>
+                  </a:lnTo>
+                  <a:lnTo>
+                    <a:pt x="1217582" y="1895455"/>
+                  </a:lnTo>
+                  <a:lnTo>
+                    <a:pt x="1289205" y="1933399"/>
+                  </a:lnTo>
+                  <a:lnTo>
+                    <a:pt x="1360827" y="1970436"/>
+                  </a:lnTo>
+                  <a:lnTo>
+                    <a:pt x="1432450" y="2006589"/>
+                  </a:lnTo>
+                  <a:lnTo>
+                    <a:pt x="1504073" y="2041877"/>
+                  </a:lnTo>
+                  <a:lnTo>
+                    <a:pt x="1575695" y="2076323"/>
+                  </a:lnTo>
+                  <a:lnTo>
+                    <a:pt x="1647318" y="2109946"/>
+                  </a:lnTo>
+                  <a:lnTo>
+                    <a:pt x="1718940" y="2142766"/>
+                  </a:lnTo>
+                  <a:lnTo>
+                    <a:pt x="1790563" y="2174801"/>
+                  </a:lnTo>
+                  <a:lnTo>
+                    <a:pt x="1862185" y="2206072"/>
+                  </a:lnTo>
+                  <a:lnTo>
+                    <a:pt x="1933808" y="2236595"/>
+                  </a:lnTo>
+                  <a:lnTo>
+                    <a:pt x="2005430" y="2266389"/>
+                  </a:lnTo>
+                  <a:lnTo>
+                    <a:pt x="2077053" y="2295471"/>
+                  </a:lnTo>
+                  <a:lnTo>
+                    <a:pt x="2148675" y="2323859"/>
+                  </a:lnTo>
+                  <a:lnTo>
+                    <a:pt x="2220298" y="2351568"/>
+                  </a:lnTo>
+                  <a:lnTo>
+                    <a:pt x="2291920" y="2378615"/>
+                  </a:lnTo>
+                  <a:lnTo>
+                    <a:pt x="2363543" y="2405017"/>
+                  </a:lnTo>
+                  <a:lnTo>
+                    <a:pt x="2435165" y="2430787"/>
+                  </a:lnTo>
+                  <a:lnTo>
+                    <a:pt x="2506788" y="2455942"/>
+                  </a:lnTo>
+                  <a:lnTo>
+                    <a:pt x="2578410" y="2480496"/>
+                  </a:lnTo>
+                  <a:lnTo>
+                    <a:pt x="2650033" y="2504463"/>
+                  </a:lnTo>
+                  <a:lnTo>
+                    <a:pt x="2721655" y="2527858"/>
+                  </a:lnTo>
+                  <a:lnTo>
+                    <a:pt x="2793278" y="2550694"/>
+                  </a:lnTo>
+                  <a:lnTo>
+                    <a:pt x="2864901" y="2572984"/>
+                  </a:lnTo>
+                  <a:lnTo>
+                    <a:pt x="2936523" y="2594742"/>
+                  </a:lnTo>
+                  <a:lnTo>
+                    <a:pt x="3008146" y="2615980"/>
+                  </a:lnTo>
+                  <a:lnTo>
+                    <a:pt x="3079768" y="2636711"/>
+                  </a:lnTo>
+                  <a:lnTo>
+                    <a:pt x="3151391" y="2650736"/>
+                  </a:lnTo>
+                  <a:lnTo>
+                    <a:pt x="3223013" y="2623577"/>
+                  </a:lnTo>
+                  <a:lnTo>
+                    <a:pt x="3294636" y="2595532"/>
+                  </a:lnTo>
+                  <a:lnTo>
+                    <a:pt x="3366258" y="2566573"/>
+                  </a:lnTo>
+                  <a:lnTo>
+                    <a:pt x="3437881" y="2536670"/>
+                  </a:lnTo>
+                  <a:lnTo>
+                    <a:pt x="3509503" y="2505792"/>
+                  </a:lnTo>
+                  <a:lnTo>
+                    <a:pt x="3581126" y="2473908"/>
+                  </a:lnTo>
+                  <a:lnTo>
+                    <a:pt x="3652748" y="2440983"/>
+                  </a:lnTo>
+                  <a:lnTo>
+                    <a:pt x="3724371" y="2406986"/>
+                  </a:lnTo>
+                  <a:lnTo>
+                    <a:pt x="3795993" y="2371880"/>
+                  </a:lnTo>
+                  <a:lnTo>
+                    <a:pt x="3867616" y="2335629"/>
+                  </a:lnTo>
+                  <a:lnTo>
+                    <a:pt x="3939238" y="2298196"/>
+                  </a:lnTo>
+                  <a:lnTo>
+                    <a:pt x="4010861" y="2259543"/>
+                  </a:lnTo>
+                  <a:lnTo>
+                    <a:pt x="4082483" y="2219630"/>
+                  </a:lnTo>
+                  <a:lnTo>
+                    <a:pt x="4154106" y="2178415"/>
+                  </a:lnTo>
+                  <a:lnTo>
+                    <a:pt x="4225729" y="2135857"/>
+                  </a:lnTo>
+                  <a:lnTo>
+                    <a:pt x="4297351" y="2091911"/>
+                  </a:lnTo>
+                  <a:lnTo>
+                    <a:pt x="4368974" y="2046532"/>
+                  </a:lnTo>
+                  <a:lnTo>
+                    <a:pt x="4440596" y="1999674"/>
+                  </a:lnTo>
+                  <a:lnTo>
+                    <a:pt x="4512219" y="1951288"/>
+                  </a:lnTo>
+                  <a:lnTo>
+                    <a:pt x="4583841" y="1901325"/>
+                  </a:lnTo>
+                  <a:lnTo>
+                    <a:pt x="4655464" y="1849732"/>
+                  </a:lnTo>
+                  <a:lnTo>
+                    <a:pt x="4727086" y="1796458"/>
+                  </a:lnTo>
+                  <a:lnTo>
+                    <a:pt x="4798709" y="1741446"/>
+                  </a:lnTo>
+                  <a:lnTo>
+                    <a:pt x="4870331" y="1684641"/>
+                  </a:lnTo>
+                  <a:lnTo>
+                    <a:pt x="4941954" y="1625984"/>
+                  </a:lnTo>
+                  <a:lnTo>
+                    <a:pt x="5013576" y="1565414"/>
+                  </a:lnTo>
+                  <a:lnTo>
+                    <a:pt x="5085199" y="1502870"/>
+                  </a:lnTo>
+                  <a:lnTo>
+                    <a:pt x="5156821" y="1438286"/>
+                  </a:lnTo>
+                  <a:lnTo>
+                    <a:pt x="5228444" y="1371597"/>
+                  </a:lnTo>
+                  <a:lnTo>
+                    <a:pt x="5300066" y="1302734"/>
+                  </a:lnTo>
+                  <a:lnTo>
+                    <a:pt x="5371689" y="1231625"/>
+                  </a:lnTo>
+                  <a:lnTo>
+                    <a:pt x="5443311" y="1158198"/>
+                  </a:lnTo>
+                  <a:lnTo>
+                    <a:pt x="5514934" y="1082377"/>
+                  </a:lnTo>
+                  <a:lnTo>
+                    <a:pt x="5586557" y="1004084"/>
+                  </a:lnTo>
+                  <a:lnTo>
+                    <a:pt x="5658179" y="923239"/>
+                  </a:lnTo>
+                  <a:lnTo>
+                    <a:pt x="5729802" y="839757"/>
+                  </a:lnTo>
+                  <a:lnTo>
+                    <a:pt x="5801424" y="753554"/>
+                  </a:lnTo>
+                  <a:lnTo>
+                    <a:pt x="5873047" y="664540"/>
+                  </a:lnTo>
+                  <a:lnTo>
+                    <a:pt x="5944669" y="572624"/>
+                  </a:lnTo>
+                  <a:lnTo>
+                    <a:pt x="6016292" y="477711"/>
+                  </a:lnTo>
+                  <a:lnTo>
+                    <a:pt x="6087914" y="379704"/>
+                  </a:lnTo>
+                  <a:lnTo>
+                    <a:pt x="6159537" y="278501"/>
+                  </a:lnTo>
+                  <a:lnTo>
+                    <a:pt x="6231159" y="173999"/>
+                  </a:lnTo>
+                  <a:lnTo>
+                    <a:pt x="6302782" y="66090"/>
+                  </a:lnTo>
+                  <a:lnTo>
+                    <a:pt x="6345263" y="0"/>
                   </a:lnTo>
                   <a:lnTo>
                     <a:pt x="7090630" y="0"/>
                   </a:lnTo>
                   <a:lnTo>
-                    <a:pt x="7090630" y="3264605"/>
-                  </a:lnTo>
-                  <a:lnTo>
-                    <a:pt x="7019007" y="3259250"/>
-                  </a:lnTo>
-                  <a:lnTo>
-                    <a:pt x="6947385" y="3253764"/>
-                  </a:lnTo>
-                  <a:lnTo>
-                    <a:pt x="6875762" y="3248145"/>
-                  </a:lnTo>
-                  <a:lnTo>
-                    <a:pt x="6804139" y="3242388"/>
-                  </a:lnTo>
-                  <a:lnTo>
-                    <a:pt x="6732517" y="3236490"/>
-                  </a:lnTo>
-                  <a:lnTo>
-                    <a:pt x="6660894" y="3230449"/>
-                  </a:lnTo>
-                  <a:lnTo>
-                    <a:pt x="6589272" y="3224259"/>
-                  </a:lnTo>
-                  <a:lnTo>
-                    <a:pt x="6517649" y="3217919"/>
-                  </a:lnTo>
-                  <a:lnTo>
-                    <a:pt x="6446027" y="3211423"/>
-                  </a:lnTo>
-                  <a:lnTo>
-                    <a:pt x="6374404" y="3204769"/>
-                  </a:lnTo>
-                  <a:lnTo>
-                    <a:pt x="6302782" y="3197952"/>
-                  </a:lnTo>
-                  <a:lnTo>
-                    <a:pt x="6231159" y="3190969"/>
-                  </a:lnTo>
-                  <a:lnTo>
-                    <a:pt x="6159537" y="3183815"/>
-                  </a:lnTo>
-                  <a:lnTo>
-                    <a:pt x="6087914" y="3176486"/>
-                  </a:lnTo>
-                  <a:lnTo>
-                    <a:pt x="6016292" y="3168978"/>
-                  </a:lnTo>
-                  <a:lnTo>
-                    <a:pt x="5944669" y="3161287"/>
-                  </a:lnTo>
-                  <a:lnTo>
-                    <a:pt x="5873047" y="3153408"/>
-                  </a:lnTo>
-                  <a:lnTo>
-                    <a:pt x="5801424" y="3145336"/>
-                  </a:lnTo>
-                  <a:lnTo>
-                    <a:pt x="5729802" y="3137067"/>
-                  </a:lnTo>
-                  <a:lnTo>
-                    <a:pt x="5658179" y="3128596"/>
-                  </a:lnTo>
-                  <a:lnTo>
-                    <a:pt x="5586557" y="3119918"/>
-                  </a:lnTo>
-                  <a:lnTo>
-                    <a:pt x="5514934" y="3111028"/>
-                  </a:lnTo>
-                  <a:lnTo>
-                    <a:pt x="5443311" y="3101920"/>
-                  </a:lnTo>
-                  <a:lnTo>
-                    <a:pt x="5371689" y="3092590"/>
-                  </a:lnTo>
-                  <a:lnTo>
-                    <a:pt x="5300066" y="3083032"/>
-                  </a:lnTo>
-                  <a:lnTo>
-                    <a:pt x="5228444" y="3073241"/>
-                  </a:lnTo>
-                  <a:lnTo>
-                    <a:pt x="5156821" y="3063210"/>
-                  </a:lnTo>
-                  <a:lnTo>
-                    <a:pt x="5085199" y="3052935"/>
-                  </a:lnTo>
-                  <a:lnTo>
-                    <a:pt x="5013576" y="3042408"/>
-                  </a:lnTo>
-                  <a:lnTo>
-                    <a:pt x="4941954" y="3031624"/>
-                  </a:lnTo>
-                  <a:lnTo>
-                    <a:pt x="4870331" y="3020576"/>
-                  </a:lnTo>
-                  <a:lnTo>
-                    <a:pt x="4798709" y="3009259"/>
-                  </a:lnTo>
-                  <a:lnTo>
-                    <a:pt x="4727086" y="2997664"/>
-                  </a:lnTo>
-                  <a:lnTo>
-                    <a:pt x="4655464" y="2985787"/>
-                  </a:lnTo>
-                  <a:lnTo>
-                    <a:pt x="4583841" y="2973619"/>
-                  </a:lnTo>
-                  <a:lnTo>
-                    <a:pt x="4512219" y="2961155"/>
-                  </a:lnTo>
-                  <a:lnTo>
-                    <a:pt x="4440596" y="2948385"/>
-                  </a:lnTo>
-                  <a:lnTo>
-                    <a:pt x="4368974" y="2935304"/>
-                  </a:lnTo>
-                  <a:lnTo>
-                    <a:pt x="4297351" y="2921902"/>
-                  </a:lnTo>
-                  <a:lnTo>
-                    <a:pt x="4225729" y="2908174"/>
-                  </a:lnTo>
-                  <a:lnTo>
-                    <a:pt x="4154106" y="2894110"/>
-                  </a:lnTo>
-                  <a:lnTo>
-                    <a:pt x="4082483" y="2879702"/>
-                  </a:lnTo>
-                  <a:lnTo>
-                    <a:pt x="4010861" y="2864942"/>
-                  </a:lnTo>
-                  <a:lnTo>
-                    <a:pt x="3939238" y="2849822"/>
-                  </a:lnTo>
-                  <a:lnTo>
-                    <a:pt x="3867616" y="2834332"/>
-                  </a:lnTo>
-                  <a:lnTo>
-                    <a:pt x="3795993" y="2818463"/>
-                  </a:lnTo>
-                  <a:lnTo>
-                    <a:pt x="3724371" y="2802207"/>
-                  </a:lnTo>
-                  <a:lnTo>
-                    <a:pt x="3652748" y="2785554"/>
-                  </a:lnTo>
-                  <a:lnTo>
-                    <a:pt x="3581126" y="2768494"/>
-                  </a:lnTo>
-                  <a:lnTo>
-                    <a:pt x="3509503" y="2751016"/>
-                  </a:lnTo>
-                  <a:lnTo>
-                    <a:pt x="3437881" y="2733112"/>
-                  </a:lnTo>
-                  <a:lnTo>
-                    <a:pt x="3366258" y="2714770"/>
-                  </a:lnTo>
-                  <a:lnTo>
-                    <a:pt x="3294636" y="2695981"/>
-                  </a:lnTo>
-                  <a:lnTo>
-                    <a:pt x="3223013" y="2676732"/>
-                  </a:lnTo>
-                  <a:lnTo>
-                    <a:pt x="3151391" y="2657012"/>
-                  </a:lnTo>
-                  <a:lnTo>
-                    <a:pt x="3079768" y="2676885"/>
-                  </a:lnTo>
-                  <a:lnTo>
-                    <a:pt x="3008146" y="2702293"/>
-                  </a:lnTo>
-                  <a:lnTo>
-                    <a:pt x="2936523" y="2726900"/>
-                  </a:lnTo>
-                  <a:lnTo>
-                    <a:pt x="2864901" y="2750733"/>
-                  </a:lnTo>
-                  <a:lnTo>
-                    <a:pt x="2793278" y="2773815"/>
-                  </a:lnTo>
-                  <a:lnTo>
-                    <a:pt x="2721655" y="2796170"/>
-                  </a:lnTo>
-                  <a:lnTo>
-                    <a:pt x="2650033" y="2817821"/>
-                  </a:lnTo>
-                  <a:lnTo>
-                    <a:pt x="2578410" y="2838791"/>
-                  </a:lnTo>
-                  <a:lnTo>
-                    <a:pt x="2506788" y="2859100"/>
-                  </a:lnTo>
-                  <a:lnTo>
-                    <a:pt x="2435165" y="2878770"/>
-                  </a:lnTo>
-                  <a:lnTo>
-                    <a:pt x="2363543" y="2897820"/>
-                  </a:lnTo>
-                  <a:lnTo>
-                    <a:pt x="2291920" y="2916271"/>
-                  </a:lnTo>
-                  <a:lnTo>
-                    <a:pt x="2220298" y="2934140"/>
-                  </a:lnTo>
-                  <a:lnTo>
-                    <a:pt x="2148675" y="2951447"/>
-                  </a:lnTo>
-                  <a:lnTo>
-                    <a:pt x="2077053" y="2968209"/>
-                  </a:lnTo>
-                  <a:lnTo>
-                    <a:pt x="2005430" y="2984443"/>
-                  </a:lnTo>
-                  <a:lnTo>
-                    <a:pt x="1933808" y="3000165"/>
-                  </a:lnTo>
-                  <a:lnTo>
-                    <a:pt x="1862185" y="3015393"/>
-                  </a:lnTo>
-                  <a:lnTo>
-                    <a:pt x="1790563" y="3030141"/>
-                  </a:lnTo>
-                  <a:lnTo>
-                    <a:pt x="1718940" y="3044425"/>
-                  </a:lnTo>
-                  <a:lnTo>
-                    <a:pt x="1647318" y="3058259"/>
-                  </a:lnTo>
-                  <a:lnTo>
-                    <a:pt x="1575695" y="3071657"/>
-                  </a:lnTo>
-                  <a:lnTo>
-                    <a:pt x="1504073" y="3084634"/>
-                  </a:lnTo>
-                  <a:lnTo>
-                    <a:pt x="1432450" y="3097201"/>
-                  </a:lnTo>
-                  <a:lnTo>
-                    <a:pt x="1360827" y="3109373"/>
-                  </a:lnTo>
-                  <a:lnTo>
-                    <a:pt x="1289205" y="3121162"/>
-                  </a:lnTo>
-                  <a:lnTo>
-                    <a:pt x="1217582" y="3132580"/>
-                  </a:lnTo>
-                  <a:lnTo>
-                    <a:pt x="1145960" y="3143638"/>
-                  </a:lnTo>
-                  <a:lnTo>
-                    <a:pt x="1074337" y="3154348"/>
-                  </a:lnTo>
-                  <a:lnTo>
-                    <a:pt x="1002715" y="3164720"/>
-                  </a:lnTo>
-                  <a:lnTo>
-                    <a:pt x="931092" y="3174766"/>
-                  </a:lnTo>
-                  <a:lnTo>
-                    <a:pt x="859470" y="3184496"/>
-                  </a:lnTo>
-                  <a:lnTo>
-                    <a:pt x="787847" y="3193919"/>
-                  </a:lnTo>
-                  <a:lnTo>
-                    <a:pt x="716225" y="3203045"/>
-                  </a:lnTo>
-                  <a:lnTo>
-                    <a:pt x="644602" y="3211884"/>
-                  </a:lnTo>
-                  <a:lnTo>
-                    <a:pt x="572980" y="3220445"/>
-                  </a:lnTo>
-                  <a:lnTo>
-                    <a:pt x="501357" y="3228736"/>
-                  </a:lnTo>
-                  <a:lnTo>
-                    <a:pt x="429735" y="3236766"/>
-                  </a:lnTo>
-                  <a:lnTo>
-                    <a:pt x="358112" y="3244544"/>
-                  </a:lnTo>
-                  <a:lnTo>
-                    <a:pt x="286490" y="3252076"/>
-                  </a:lnTo>
-                  <a:lnTo>
-                    <a:pt x="214867" y="3259371"/>
-                  </a:lnTo>
-                  <a:lnTo>
-                    <a:pt x="143245" y="3266437"/>
-                  </a:lnTo>
-                  <a:lnTo>
-                    <a:pt x="71622" y="3273280"/>
-                  </a:lnTo>
-                  <a:lnTo>
-                    <a:pt x="0" y="3279907"/>
+                    <a:pt x="7090630" y="3265051"/>
+                  </a:lnTo>
+                  <a:lnTo>
+                    <a:pt x="7019007" y="3259698"/>
+                  </a:lnTo>
+                  <a:lnTo>
+                    <a:pt x="6947385" y="3254215"/>
+                  </a:lnTo>
+                  <a:lnTo>
+                    <a:pt x="6875762" y="3248597"/>
+                  </a:lnTo>
+                  <a:lnTo>
+                    <a:pt x="6804139" y="3242842"/>
+                  </a:lnTo>
+                  <a:lnTo>
+                    <a:pt x="6732517" y="3236946"/>
+                  </a:lnTo>
+                  <a:lnTo>
+                    <a:pt x="6660894" y="3230906"/>
+                  </a:lnTo>
+                  <a:lnTo>
+                    <a:pt x="6589272" y="3224718"/>
+                  </a:lnTo>
+                  <a:lnTo>
+                    <a:pt x="6517649" y="3218378"/>
+                  </a:lnTo>
+                  <a:lnTo>
+                    <a:pt x="6446027" y="3211883"/>
+                  </a:lnTo>
+                  <a:lnTo>
+                    <a:pt x="6374404" y="3205230"/>
+                  </a:lnTo>
+                  <a:lnTo>
+                    <a:pt x="6302782" y="3198413"/>
+                  </a:lnTo>
+                  <a:lnTo>
+                    <a:pt x="6231159" y="3191430"/>
+                  </a:lnTo>
+                  <a:lnTo>
+                    <a:pt x="6159537" y="3184275"/>
+                  </a:lnTo>
+                  <a:lnTo>
+                    <a:pt x="6087914" y="3176946"/>
+                  </a:lnTo>
+                  <a:lnTo>
+                    <a:pt x="6016292" y="3169437"/>
+                  </a:lnTo>
+                  <a:lnTo>
+                    <a:pt x="5944669" y="3161745"/>
+                  </a:lnTo>
+                  <a:lnTo>
+                    <a:pt x="5873047" y="3153864"/>
+                  </a:lnTo>
+                  <a:lnTo>
+                    <a:pt x="5801424" y="3145790"/>
+                  </a:lnTo>
+                  <a:lnTo>
+                    <a:pt x="5729802" y="3137519"/>
+                  </a:lnTo>
+                  <a:lnTo>
+                    <a:pt x="5658179" y="3129045"/>
+                  </a:lnTo>
+                  <a:lnTo>
+                    <a:pt x="5586557" y="3120364"/>
+                  </a:lnTo>
+                  <a:lnTo>
+                    <a:pt x="5514934" y="3111471"/>
+                  </a:lnTo>
+                  <a:lnTo>
+                    <a:pt x="5443311" y="3102360"/>
+                  </a:lnTo>
+                  <a:lnTo>
+                    <a:pt x="5371689" y="3093025"/>
+                  </a:lnTo>
+                  <a:lnTo>
+                    <a:pt x="5300066" y="3083463"/>
+                  </a:lnTo>
+                  <a:lnTo>
+                    <a:pt x="5228444" y="3073666"/>
+                  </a:lnTo>
+                  <a:lnTo>
+                    <a:pt x="5156821" y="3063630"/>
+                  </a:lnTo>
+                  <a:lnTo>
+                    <a:pt x="5085199" y="3053348"/>
+                  </a:lnTo>
+                  <a:lnTo>
+                    <a:pt x="5013576" y="3042814"/>
+                  </a:lnTo>
+                  <a:lnTo>
+                    <a:pt x="4941954" y="3032022"/>
+                  </a:lnTo>
+                  <a:lnTo>
+                    <a:pt x="4870331" y="3020967"/>
+                  </a:lnTo>
+                  <a:lnTo>
+                    <a:pt x="4798709" y="3009640"/>
+                  </a:lnTo>
+                  <a:lnTo>
+                    <a:pt x="4727086" y="2998037"/>
+                  </a:lnTo>
+                  <a:lnTo>
+                    <a:pt x="4655464" y="2986149"/>
+                  </a:lnTo>
+                  <a:lnTo>
+                    <a:pt x="4583841" y="2973971"/>
+                  </a:lnTo>
+                  <a:lnTo>
+                    <a:pt x="4512219" y="2961495"/>
+                  </a:lnTo>
+                  <a:lnTo>
+                    <a:pt x="4440596" y="2948713"/>
+                  </a:lnTo>
+                  <a:lnTo>
+                    <a:pt x="4368974" y="2935618"/>
+                  </a:lnTo>
+                  <a:lnTo>
+                    <a:pt x="4297351" y="2922203"/>
+                  </a:lnTo>
+                  <a:lnTo>
+                    <a:pt x="4225729" y="2908460"/>
+                  </a:lnTo>
+                  <a:lnTo>
+                    <a:pt x="4154106" y="2894380"/>
+                  </a:lnTo>
+                  <a:lnTo>
+                    <a:pt x="4082483" y="2879956"/>
+                  </a:lnTo>
+                  <a:lnTo>
+                    <a:pt x="4010861" y="2865178"/>
+                  </a:lnTo>
+                  <a:lnTo>
+                    <a:pt x="3939238" y="2850039"/>
+                  </a:lnTo>
+                  <a:lnTo>
+                    <a:pt x="3867616" y="2834530"/>
+                  </a:lnTo>
+                  <a:lnTo>
+                    <a:pt x="3795993" y="2818640"/>
+                  </a:lnTo>
+                  <a:lnTo>
+                    <a:pt x="3724371" y="2802362"/>
+                  </a:lnTo>
+                  <a:lnTo>
+                    <a:pt x="3652748" y="2785686"/>
+                  </a:lnTo>
+                  <a:lnTo>
+                    <a:pt x="3581126" y="2768601"/>
+                  </a:lnTo>
+                  <a:lnTo>
+                    <a:pt x="3509503" y="2751099"/>
+                  </a:lnTo>
+                  <a:lnTo>
+                    <a:pt x="3437881" y="2733168"/>
+                  </a:lnTo>
+                  <a:lnTo>
+                    <a:pt x="3366258" y="2714798"/>
+                  </a:lnTo>
+                  <a:lnTo>
+                    <a:pt x="3294636" y="2695978"/>
+                  </a:lnTo>
+                  <a:lnTo>
+                    <a:pt x="3223013" y="2676698"/>
+                  </a:lnTo>
+                  <a:lnTo>
+                    <a:pt x="3151391" y="2656946"/>
+                  </a:lnTo>
+                  <a:lnTo>
+                    <a:pt x="3079768" y="2677037"/>
+                  </a:lnTo>
+                  <a:lnTo>
+                    <a:pt x="3008146" y="2702509"/>
+                  </a:lnTo>
+                  <a:lnTo>
+                    <a:pt x="2936523" y="2727175"/>
+                  </a:lnTo>
+                  <a:lnTo>
+                    <a:pt x="2864901" y="2751063"/>
+                  </a:lnTo>
+                  <a:lnTo>
+                    <a:pt x="2793278" y="2774197"/>
+                  </a:lnTo>
+                  <a:lnTo>
+                    <a:pt x="2721655" y="2796601"/>
+                  </a:lnTo>
+                  <a:lnTo>
+                    <a:pt x="2650033" y="2818297"/>
+                  </a:lnTo>
+                  <a:lnTo>
+                    <a:pt x="2578410" y="2839308"/>
+                  </a:lnTo>
+                  <a:lnTo>
+                    <a:pt x="2506788" y="2859655"/>
+                  </a:lnTo>
+                  <a:lnTo>
+                    <a:pt x="2435165" y="2879360"/>
+                  </a:lnTo>
+                  <a:lnTo>
+                    <a:pt x="2363543" y="2898443"/>
+                  </a:lnTo>
+                  <a:lnTo>
+                    <a:pt x="2291920" y="2916924"/>
+                  </a:lnTo>
+                  <a:lnTo>
+                    <a:pt x="2220298" y="2934820"/>
+                  </a:lnTo>
+                  <a:lnTo>
+                    <a:pt x="2148675" y="2952152"/>
+                  </a:lnTo>
+                  <a:lnTo>
+                    <a:pt x="2077053" y="2968937"/>
+                  </a:lnTo>
+                  <a:lnTo>
+                    <a:pt x="2005430" y="2985191"/>
+                  </a:lnTo>
+                  <a:lnTo>
+                    <a:pt x="1933808" y="3000933"/>
+                  </a:lnTo>
+                  <a:lnTo>
+                    <a:pt x="1862185" y="3016177"/>
+                  </a:lnTo>
+                  <a:lnTo>
+                    <a:pt x="1790563" y="3030940"/>
+                  </a:lnTo>
+                  <a:lnTo>
+                    <a:pt x="1718940" y="3045237"/>
+                  </a:lnTo>
+                  <a:lnTo>
+                    <a:pt x="1647318" y="3059083"/>
+                  </a:lnTo>
+                  <a:lnTo>
+                    <a:pt x="1575695" y="3072491"/>
+                  </a:lnTo>
+                  <a:lnTo>
+                    <a:pt x="1504073" y="3085476"/>
+                  </a:lnTo>
+                  <a:lnTo>
+                    <a:pt x="1432450" y="3098051"/>
+                  </a:lnTo>
+                  <a:lnTo>
+                    <a:pt x="1360827" y="3110229"/>
+                  </a:lnTo>
+                  <a:lnTo>
+                    <a:pt x="1289205" y="3122023"/>
+                  </a:lnTo>
+                  <a:lnTo>
+                    <a:pt x="1217582" y="3133444"/>
+                  </a:lnTo>
+                  <a:lnTo>
+                    <a:pt x="1145960" y="3144504"/>
+                  </a:lnTo>
+                  <a:lnTo>
+                    <a:pt x="1074337" y="3155215"/>
+                  </a:lnTo>
+                  <a:lnTo>
+                    <a:pt x="1002715" y="3165588"/>
+                  </a:lnTo>
+                  <a:lnTo>
+                    <a:pt x="931092" y="3175634"/>
+                  </a:lnTo>
+                  <a:lnTo>
+                    <a:pt x="859470" y="3185362"/>
+                  </a:lnTo>
+                  <a:lnTo>
+                    <a:pt x="787847" y="3194784"/>
+                  </a:lnTo>
+                  <a:lnTo>
+                    <a:pt x="716225" y="3203907"/>
+                  </a:lnTo>
+                  <a:lnTo>
+                    <a:pt x="644602" y="3212743"/>
+                  </a:lnTo>
+                  <a:lnTo>
+                    <a:pt x="572980" y="3221300"/>
+                  </a:lnTo>
+                  <a:lnTo>
+                    <a:pt x="501357" y="3229586"/>
+                  </a:lnTo>
+                  <a:lnTo>
+                    <a:pt x="429735" y="3237611"/>
+                  </a:lnTo>
+                  <a:lnTo>
+                    <a:pt x="358112" y="3245383"/>
+                  </a:lnTo>
+                  <a:lnTo>
+                    <a:pt x="286490" y="3252909"/>
+                  </a:lnTo>
+                  <a:lnTo>
+                    <a:pt x="214867" y="3260197"/>
+                  </a:lnTo>
+                  <a:lnTo>
+                    <a:pt x="143245" y="3267255"/>
+                  </a:lnTo>
+                  <a:lnTo>
+                    <a:pt x="71622" y="3274091"/>
+                  </a:lnTo>
+                  <a:lnTo>
+                    <a:pt x="0" y="3280711"/>
                   </a:lnTo>
                   <a:close/>
                 </a:path>
@@ -3607,281 +3607,281 @@
           <p:spPr>
             <a:xfrm>
               <a:off x="1172049" y="2073503"/>
-              <a:ext cx="6353812" cy="2650652"/>
+              <a:ext cx="6345263" cy="2650736"/>
             </a:xfrm>
             <a:custGeom>
               <a:avLst/>
               <a:pathLst>
-                <a:path w="6353812" h="2650652">
+                <a:path w="6345263" h="2650736">
                   <a:moveTo>
-                    <a:pt x="0" y="1092201"/>
+                    <a:pt x="0" y="1087956"/>
                   </a:moveTo>
                   <a:lnTo>
-                    <a:pt x="71622" y="1149245"/>
-                  </a:lnTo>
-                  <a:lnTo>
-                    <a:pt x="143245" y="1204928"/>
-                  </a:lnTo>
-                  <a:lnTo>
-                    <a:pt x="214867" y="1259282"/>
-                  </a:lnTo>
-                  <a:lnTo>
-                    <a:pt x="286490" y="1312340"/>
-                  </a:lnTo>
-                  <a:lnTo>
-                    <a:pt x="358112" y="1364133"/>
-                  </a:lnTo>
-                  <a:lnTo>
-                    <a:pt x="429735" y="1414690"/>
-                  </a:lnTo>
-                  <a:lnTo>
-                    <a:pt x="501357" y="1464042"/>
-                  </a:lnTo>
-                  <a:lnTo>
-                    <a:pt x="572980" y="1512216"/>
-                  </a:lnTo>
-                  <a:lnTo>
-                    <a:pt x="644602" y="1559241"/>
-                  </a:lnTo>
-                  <a:lnTo>
-                    <a:pt x="716225" y="1605144"/>
-                  </a:lnTo>
-                  <a:lnTo>
-                    <a:pt x="787847" y="1649953"/>
-                  </a:lnTo>
-                  <a:lnTo>
-                    <a:pt x="859470" y="1693693"/>
-                  </a:lnTo>
-                  <a:lnTo>
-                    <a:pt x="931092" y="1736389"/>
-                  </a:lnTo>
-                  <a:lnTo>
-                    <a:pt x="1002715" y="1778068"/>
-                  </a:lnTo>
-                  <a:lnTo>
-                    <a:pt x="1074337" y="1818752"/>
-                  </a:lnTo>
-                  <a:lnTo>
-                    <a:pt x="1145960" y="1858465"/>
-                  </a:lnTo>
-                  <a:lnTo>
-                    <a:pt x="1217582" y="1897232"/>
-                  </a:lnTo>
-                  <a:lnTo>
-                    <a:pt x="1289205" y="1935073"/>
-                  </a:lnTo>
-                  <a:lnTo>
-                    <a:pt x="1360827" y="1972012"/>
-                  </a:lnTo>
-                  <a:lnTo>
-                    <a:pt x="1432450" y="2008071"/>
-                  </a:lnTo>
-                  <a:lnTo>
-                    <a:pt x="1504073" y="2043269"/>
-                  </a:lnTo>
-                  <a:lnTo>
-                    <a:pt x="1575695" y="2077627"/>
-                  </a:lnTo>
-                  <a:lnTo>
-                    <a:pt x="1647318" y="2111166"/>
-                  </a:lnTo>
-                  <a:lnTo>
-                    <a:pt x="1718940" y="2143905"/>
-                  </a:lnTo>
-                  <a:lnTo>
-                    <a:pt x="1790563" y="2175863"/>
-                  </a:lnTo>
-                  <a:lnTo>
-                    <a:pt x="1862185" y="2207059"/>
-                  </a:lnTo>
-                  <a:lnTo>
-                    <a:pt x="1933808" y="2237510"/>
-                  </a:lnTo>
-                  <a:lnTo>
-                    <a:pt x="2005430" y="2267236"/>
-                  </a:lnTo>
-                  <a:lnTo>
-                    <a:pt x="2077053" y="2296252"/>
-                  </a:lnTo>
-                  <a:lnTo>
-                    <a:pt x="2148675" y="2324576"/>
-                  </a:lnTo>
-                  <a:lnTo>
-                    <a:pt x="2220298" y="2352225"/>
-                  </a:lnTo>
-                  <a:lnTo>
-                    <a:pt x="2291920" y="2379214"/>
-                  </a:lnTo>
-                  <a:lnTo>
-                    <a:pt x="2363543" y="2405560"/>
-                  </a:lnTo>
-                  <a:lnTo>
-                    <a:pt x="2435165" y="2431277"/>
-                  </a:lnTo>
-                  <a:lnTo>
-                    <a:pt x="2506788" y="2456380"/>
-                  </a:lnTo>
-                  <a:lnTo>
-                    <a:pt x="2578410" y="2480885"/>
-                  </a:lnTo>
-                  <a:lnTo>
-                    <a:pt x="2650033" y="2504805"/>
-                  </a:lnTo>
-                  <a:lnTo>
-                    <a:pt x="2721655" y="2528155"/>
-                  </a:lnTo>
-                  <a:lnTo>
-                    <a:pt x="2793278" y="2550948"/>
-                  </a:lnTo>
-                  <a:lnTo>
-                    <a:pt x="2864901" y="2573197"/>
-                  </a:lnTo>
-                  <a:lnTo>
-                    <a:pt x="2936523" y="2594916"/>
-                  </a:lnTo>
-                  <a:lnTo>
-                    <a:pt x="3008146" y="2616116"/>
-                  </a:lnTo>
-                  <a:lnTo>
-                    <a:pt x="3079768" y="2636811"/>
-                  </a:lnTo>
-                  <a:lnTo>
-                    <a:pt x="3151391" y="2650652"/>
-                  </a:lnTo>
-                  <a:lnTo>
-                    <a:pt x="3223013" y="2623565"/>
-                  </a:lnTo>
-                  <a:lnTo>
-                    <a:pt x="3294636" y="2595598"/>
-                  </a:lnTo>
-                  <a:lnTo>
-                    <a:pt x="3366258" y="2566721"/>
-                  </a:lnTo>
-                  <a:lnTo>
-                    <a:pt x="3437881" y="2536906"/>
-                  </a:lnTo>
-                  <a:lnTo>
-                    <a:pt x="3509503" y="2506121"/>
-                  </a:lnTo>
-                  <a:lnTo>
-                    <a:pt x="3581126" y="2474335"/>
-                  </a:lnTo>
-                  <a:lnTo>
-                    <a:pt x="3652748" y="2441516"/>
-                  </a:lnTo>
-                  <a:lnTo>
-                    <a:pt x="3724371" y="2407630"/>
-                  </a:lnTo>
-                  <a:lnTo>
-                    <a:pt x="3795993" y="2372642"/>
-                  </a:lnTo>
-                  <a:lnTo>
-                    <a:pt x="3867616" y="2336516"/>
-                  </a:lnTo>
-                  <a:lnTo>
-                    <a:pt x="3939238" y="2299216"/>
-                  </a:lnTo>
-                  <a:lnTo>
-                    <a:pt x="4010861" y="2260704"/>
-                  </a:lnTo>
-                  <a:lnTo>
-                    <a:pt x="4082483" y="2220939"/>
-                  </a:lnTo>
-                  <a:lnTo>
-                    <a:pt x="4154106" y="2179881"/>
-                  </a:lnTo>
-                  <a:lnTo>
-                    <a:pt x="4225729" y="2137488"/>
-                  </a:lnTo>
-                  <a:lnTo>
-                    <a:pt x="4297351" y="2093717"/>
-                  </a:lnTo>
-                  <a:lnTo>
-                    <a:pt x="4368974" y="2048522"/>
-                  </a:lnTo>
-                  <a:lnTo>
-                    <a:pt x="4440596" y="2001859"/>
-                  </a:lnTo>
-                  <a:lnTo>
-                    <a:pt x="4512219" y="1953678"/>
-                  </a:lnTo>
-                  <a:lnTo>
-                    <a:pt x="4583841" y="1903931"/>
-                  </a:lnTo>
-                  <a:lnTo>
-                    <a:pt x="4655464" y="1852566"/>
-                  </a:lnTo>
-                  <a:lnTo>
-                    <a:pt x="4727086" y="1799531"/>
-                  </a:lnTo>
-                  <a:lnTo>
-                    <a:pt x="4798709" y="1744772"/>
-                  </a:lnTo>
-                  <a:lnTo>
-                    <a:pt x="4870331" y="1688232"/>
-                  </a:lnTo>
-                  <a:lnTo>
-                    <a:pt x="4941954" y="1629854"/>
-                  </a:lnTo>
-                  <a:lnTo>
-                    <a:pt x="5013576" y="1569578"/>
-                  </a:lnTo>
-                  <a:lnTo>
-                    <a:pt x="5085199" y="1507343"/>
-                  </a:lnTo>
-                  <a:lnTo>
-                    <a:pt x="5156821" y="1443084"/>
-                  </a:lnTo>
-                  <a:lnTo>
-                    <a:pt x="5228444" y="1376735"/>
-                  </a:lnTo>
-                  <a:lnTo>
-                    <a:pt x="5300066" y="1308230"/>
-                  </a:lnTo>
-                  <a:lnTo>
-                    <a:pt x="5371689" y="1237497"/>
-                  </a:lnTo>
-                  <a:lnTo>
-                    <a:pt x="5443311" y="1164464"/>
-                  </a:lnTo>
-                  <a:lnTo>
-                    <a:pt x="5514934" y="1089057"/>
-                  </a:lnTo>
-                  <a:lnTo>
-                    <a:pt x="5586557" y="1011198"/>
-                  </a:lnTo>
-                  <a:lnTo>
-                    <a:pt x="5658179" y="930807"/>
-                  </a:lnTo>
-                  <a:lnTo>
-                    <a:pt x="5729802" y="847803"/>
-                  </a:lnTo>
-                  <a:lnTo>
-                    <a:pt x="5801424" y="762100"/>
-                  </a:lnTo>
-                  <a:lnTo>
-                    <a:pt x="5873047" y="673611"/>
-                  </a:lnTo>
-                  <a:lnTo>
-                    <a:pt x="5944669" y="582245"/>
-                  </a:lnTo>
-                  <a:lnTo>
-                    <a:pt x="6016292" y="487907"/>
-                  </a:lnTo>
-                  <a:lnTo>
-                    <a:pt x="6087914" y="390503"/>
-                  </a:lnTo>
-                  <a:lnTo>
-                    <a:pt x="6159537" y="289932"/>
-                  </a:lnTo>
-                  <a:lnTo>
-                    <a:pt x="6231159" y="186091"/>
-                  </a:lnTo>
-                  <a:lnTo>
-                    <a:pt x="6302782" y="78874"/>
-                  </a:lnTo>
-                  <a:lnTo>
-                    <a:pt x="6353812" y="0"/>
+                    <a:pt x="71622" y="1145191"/>
+                  </a:lnTo>
+                  <a:lnTo>
+                    <a:pt x="143245" y="1201058"/>
+                  </a:lnTo>
+                  <a:lnTo>
+                    <a:pt x="214867" y="1255591"/>
+                  </a:lnTo>
+                  <a:lnTo>
+                    <a:pt x="286490" y="1308821"/>
+                  </a:lnTo>
+                  <a:lnTo>
+                    <a:pt x="358112" y="1360779"/>
+                  </a:lnTo>
+                  <a:lnTo>
+                    <a:pt x="429735" y="1411496"/>
+                  </a:lnTo>
+                  <a:lnTo>
+                    <a:pt x="501357" y="1461001"/>
+                  </a:lnTo>
+                  <a:lnTo>
+                    <a:pt x="572980" y="1509324"/>
+                  </a:lnTo>
+                  <a:lnTo>
+                    <a:pt x="644602" y="1556492"/>
+                  </a:lnTo>
+                  <a:lnTo>
+                    <a:pt x="716225" y="1602534"/>
+                  </a:lnTo>
+                  <a:lnTo>
+                    <a:pt x="787847" y="1647475"/>
+                  </a:lnTo>
+                  <a:lnTo>
+                    <a:pt x="859470" y="1691343"/>
+                  </a:lnTo>
+                  <a:lnTo>
+                    <a:pt x="931092" y="1734163"/>
+                  </a:lnTo>
+                  <a:lnTo>
+                    <a:pt x="1002715" y="1775960"/>
+                  </a:lnTo>
+                  <a:lnTo>
+                    <a:pt x="1074337" y="1816759"/>
+                  </a:lnTo>
+                  <a:lnTo>
+                    <a:pt x="1145960" y="1856583"/>
+                  </a:lnTo>
+                  <a:lnTo>
+                    <a:pt x="1217582" y="1895455"/>
+                  </a:lnTo>
+                  <a:lnTo>
+                    <a:pt x="1289205" y="1933399"/>
+                  </a:lnTo>
+                  <a:lnTo>
+                    <a:pt x="1360827" y="1970436"/>
+                  </a:lnTo>
+                  <a:lnTo>
+                    <a:pt x="1432450" y="2006589"/>
+                  </a:lnTo>
+                  <a:lnTo>
+                    <a:pt x="1504073" y="2041877"/>
+                  </a:lnTo>
+                  <a:lnTo>
+                    <a:pt x="1575695" y="2076323"/>
+                  </a:lnTo>
+                  <a:lnTo>
+                    <a:pt x="1647318" y="2109946"/>
+                  </a:lnTo>
+                  <a:lnTo>
+                    <a:pt x="1718940" y="2142766"/>
+                  </a:lnTo>
+                  <a:lnTo>
+                    <a:pt x="1790563" y="2174801"/>
+                  </a:lnTo>
+                  <a:lnTo>
+                    <a:pt x="1862185" y="2206072"/>
+                  </a:lnTo>
+                  <a:lnTo>
+                    <a:pt x="1933808" y="2236595"/>
+                  </a:lnTo>
+                  <a:lnTo>
+                    <a:pt x="2005430" y="2266389"/>
+                  </a:lnTo>
+                  <a:lnTo>
+                    <a:pt x="2077053" y="2295471"/>
+                  </a:lnTo>
+                  <a:lnTo>
+                    <a:pt x="2148675" y="2323859"/>
+                  </a:lnTo>
+                  <a:lnTo>
+                    <a:pt x="2220298" y="2351568"/>
+                  </a:lnTo>
+                  <a:lnTo>
+                    <a:pt x="2291920" y="2378615"/>
+                  </a:lnTo>
+                  <a:lnTo>
+                    <a:pt x="2363543" y="2405017"/>
+                  </a:lnTo>
+                  <a:lnTo>
+                    <a:pt x="2435165" y="2430787"/>
+                  </a:lnTo>
+                  <a:lnTo>
+                    <a:pt x="2506788" y="2455942"/>
+                  </a:lnTo>
+                  <a:lnTo>
+                    <a:pt x="2578410" y="2480496"/>
+                  </a:lnTo>
+                  <a:lnTo>
+                    <a:pt x="2650033" y="2504463"/>
+                  </a:lnTo>
+                  <a:lnTo>
+                    <a:pt x="2721655" y="2527858"/>
+                  </a:lnTo>
+                  <a:lnTo>
+                    <a:pt x="2793278" y="2550694"/>
+                  </a:lnTo>
+                  <a:lnTo>
+                    <a:pt x="2864901" y="2572984"/>
+                  </a:lnTo>
+                  <a:lnTo>
+                    <a:pt x="2936523" y="2594742"/>
+                  </a:lnTo>
+                  <a:lnTo>
+                    <a:pt x="3008146" y="2615980"/>
+                  </a:lnTo>
+                  <a:lnTo>
+                    <a:pt x="3079768" y="2636711"/>
+                  </a:lnTo>
+                  <a:lnTo>
+                    <a:pt x="3151391" y="2650736"/>
+                  </a:lnTo>
+                  <a:lnTo>
+                    <a:pt x="3223013" y="2623577"/>
+                  </a:lnTo>
+                  <a:lnTo>
+                    <a:pt x="3294636" y="2595532"/>
+                  </a:lnTo>
+                  <a:lnTo>
+                    <a:pt x="3366258" y="2566573"/>
+                  </a:lnTo>
+                  <a:lnTo>
+                    <a:pt x="3437881" y="2536670"/>
+                  </a:lnTo>
+                  <a:lnTo>
+                    <a:pt x="3509503" y="2505792"/>
+                  </a:lnTo>
+                  <a:lnTo>
+                    <a:pt x="3581126" y="2473908"/>
+                  </a:lnTo>
+                  <a:lnTo>
+                    <a:pt x="3652748" y="2440983"/>
+                  </a:lnTo>
+                  <a:lnTo>
+                    <a:pt x="3724371" y="2406986"/>
+                  </a:lnTo>
+                  <a:lnTo>
+                    <a:pt x="3795993" y="2371880"/>
+                  </a:lnTo>
+                  <a:lnTo>
+                    <a:pt x="3867616" y="2335629"/>
+                  </a:lnTo>
+                  <a:lnTo>
+                    <a:pt x="3939238" y="2298196"/>
+                  </a:lnTo>
+                  <a:lnTo>
+                    <a:pt x="4010861" y="2259543"/>
+                  </a:lnTo>
+                  <a:lnTo>
+                    <a:pt x="4082483" y="2219630"/>
+                  </a:lnTo>
+                  <a:lnTo>
+                    <a:pt x="4154106" y="2178415"/>
+                  </a:lnTo>
+                  <a:lnTo>
+                    <a:pt x="4225729" y="2135857"/>
+                  </a:lnTo>
+                  <a:lnTo>
+                    <a:pt x="4297351" y="2091911"/>
+                  </a:lnTo>
+                  <a:lnTo>
+                    <a:pt x="4368974" y="2046532"/>
+                  </a:lnTo>
+                  <a:lnTo>
+                    <a:pt x="4440596" y="1999674"/>
+                  </a:lnTo>
+                  <a:lnTo>
+                    <a:pt x="4512219" y="1951288"/>
+                  </a:lnTo>
+                  <a:lnTo>
+                    <a:pt x="4583841" y="1901325"/>
+                  </a:lnTo>
+                  <a:lnTo>
+                    <a:pt x="4655464" y="1849732"/>
+                  </a:lnTo>
+                  <a:lnTo>
+                    <a:pt x="4727086" y="1796458"/>
+                  </a:lnTo>
+                  <a:lnTo>
+                    <a:pt x="4798709" y="1741446"/>
+                  </a:lnTo>
+                  <a:lnTo>
+                    <a:pt x="4870331" y="1684641"/>
+                  </a:lnTo>
+                  <a:lnTo>
+                    <a:pt x="4941954" y="1625984"/>
+                  </a:lnTo>
+                  <a:lnTo>
+                    <a:pt x="5013576" y="1565414"/>
+                  </a:lnTo>
+                  <a:lnTo>
+                    <a:pt x="5085199" y="1502870"/>
+                  </a:lnTo>
+                  <a:lnTo>
+                    <a:pt x="5156821" y="1438286"/>
+                  </a:lnTo>
+                  <a:lnTo>
+                    <a:pt x="5228444" y="1371597"/>
+                  </a:lnTo>
+                  <a:lnTo>
+                    <a:pt x="5300066" y="1302734"/>
+                  </a:lnTo>
+                  <a:lnTo>
+                    <a:pt x="5371689" y="1231625"/>
+                  </a:lnTo>
+                  <a:lnTo>
+                    <a:pt x="5443311" y="1158198"/>
+                  </a:lnTo>
+                  <a:lnTo>
+                    <a:pt x="5514934" y="1082377"/>
+                  </a:lnTo>
+                  <a:lnTo>
+                    <a:pt x="5586557" y="1004084"/>
+                  </a:lnTo>
+                  <a:lnTo>
+                    <a:pt x="5658179" y="923239"/>
+                  </a:lnTo>
+                  <a:lnTo>
+                    <a:pt x="5729802" y="839757"/>
+                  </a:lnTo>
+                  <a:lnTo>
+                    <a:pt x="5801424" y="753554"/>
+                  </a:lnTo>
+                  <a:lnTo>
+                    <a:pt x="5873047" y="664540"/>
+                  </a:lnTo>
+                  <a:lnTo>
+                    <a:pt x="5944669" y="572624"/>
+                  </a:lnTo>
+                  <a:lnTo>
+                    <a:pt x="6016292" y="477711"/>
+                  </a:lnTo>
+                  <a:lnTo>
+                    <a:pt x="6087914" y="379704"/>
+                  </a:lnTo>
+                  <a:lnTo>
+                    <a:pt x="6159537" y="278501"/>
+                  </a:lnTo>
+                  <a:lnTo>
+                    <a:pt x="6231159" y="173999"/>
+                  </a:lnTo>
+                  <a:lnTo>
+                    <a:pt x="6302782" y="66090"/>
+                  </a:lnTo>
+                  <a:lnTo>
+                    <a:pt x="6345263" y="0"/>
                   </a:lnTo>
                 </a:path>
               </a:pathLst>
@@ -3901,312 +3901,312 @@
           </p:nvSpPr>
           <p:spPr>
             <a:xfrm>
-              <a:off x="1172049" y="4730515"/>
-              <a:ext cx="7090630" cy="622894"/>
+              <a:off x="1172049" y="4730449"/>
+              <a:ext cx="7090630" cy="623764"/>
             </a:xfrm>
             <a:custGeom>
               <a:avLst/>
               <a:pathLst>
-                <a:path w="7090630" h="622894">
+                <a:path w="7090630" h="623764">
                   <a:moveTo>
-                    <a:pt x="7090630" y="607592"/>
+                    <a:pt x="7090630" y="608104"/>
                   </a:moveTo>
                   <a:lnTo>
-                    <a:pt x="7019007" y="602237"/>
-                  </a:lnTo>
-                  <a:lnTo>
-                    <a:pt x="6947385" y="596752"/>
-                  </a:lnTo>
-                  <a:lnTo>
-                    <a:pt x="6875762" y="591132"/>
-                  </a:lnTo>
-                  <a:lnTo>
-                    <a:pt x="6804139" y="585375"/>
-                  </a:lnTo>
-                  <a:lnTo>
-                    <a:pt x="6732517" y="579478"/>
-                  </a:lnTo>
-                  <a:lnTo>
-                    <a:pt x="6660894" y="573436"/>
-                  </a:lnTo>
-                  <a:lnTo>
-                    <a:pt x="6589272" y="567247"/>
-                  </a:lnTo>
-                  <a:lnTo>
-                    <a:pt x="6517649" y="560906"/>
-                  </a:lnTo>
-                  <a:lnTo>
-                    <a:pt x="6446027" y="554411"/>
-                  </a:lnTo>
-                  <a:lnTo>
-                    <a:pt x="6374404" y="547756"/>
-                  </a:lnTo>
-                  <a:lnTo>
-                    <a:pt x="6302782" y="540940"/>
-                  </a:lnTo>
-                  <a:lnTo>
-                    <a:pt x="6231159" y="533956"/>
-                  </a:lnTo>
-                  <a:lnTo>
-                    <a:pt x="6159537" y="526802"/>
-                  </a:lnTo>
-                  <a:lnTo>
-                    <a:pt x="6087914" y="519473"/>
-                  </a:lnTo>
-                  <a:lnTo>
-                    <a:pt x="6016292" y="511966"/>
-                  </a:lnTo>
-                  <a:lnTo>
-                    <a:pt x="5944669" y="504274"/>
-                  </a:lnTo>
-                  <a:lnTo>
-                    <a:pt x="5873047" y="496395"/>
-                  </a:lnTo>
-                  <a:lnTo>
-                    <a:pt x="5801424" y="488323"/>
-                  </a:lnTo>
-                  <a:lnTo>
-                    <a:pt x="5729802" y="480054"/>
-                  </a:lnTo>
-                  <a:lnTo>
-                    <a:pt x="5658179" y="471583"/>
-                  </a:lnTo>
-                  <a:lnTo>
-                    <a:pt x="5586557" y="462905"/>
-                  </a:lnTo>
-                  <a:lnTo>
-                    <a:pt x="5514934" y="454015"/>
-                  </a:lnTo>
-                  <a:lnTo>
-                    <a:pt x="5443311" y="444907"/>
-                  </a:lnTo>
-                  <a:lnTo>
-                    <a:pt x="5371689" y="435578"/>
-                  </a:lnTo>
-                  <a:lnTo>
-                    <a:pt x="5300066" y="426020"/>
-                  </a:lnTo>
-                  <a:lnTo>
-                    <a:pt x="5228444" y="416228"/>
-                  </a:lnTo>
-                  <a:lnTo>
-                    <a:pt x="5156821" y="406198"/>
-                  </a:lnTo>
-                  <a:lnTo>
-                    <a:pt x="5085199" y="395922"/>
-                  </a:lnTo>
-                  <a:lnTo>
-                    <a:pt x="5013576" y="385395"/>
-                  </a:lnTo>
-                  <a:lnTo>
-                    <a:pt x="4941954" y="374611"/>
-                  </a:lnTo>
-                  <a:lnTo>
-                    <a:pt x="4870331" y="363563"/>
-                  </a:lnTo>
-                  <a:lnTo>
-                    <a:pt x="4798709" y="352246"/>
-                  </a:lnTo>
-                  <a:lnTo>
-                    <a:pt x="4727086" y="340652"/>
-                  </a:lnTo>
-                  <a:lnTo>
-                    <a:pt x="4655464" y="328774"/>
-                  </a:lnTo>
-                  <a:lnTo>
-                    <a:pt x="4583841" y="316607"/>
-                  </a:lnTo>
-                  <a:lnTo>
-                    <a:pt x="4512219" y="304142"/>
-                  </a:lnTo>
-                  <a:lnTo>
-                    <a:pt x="4440596" y="291372"/>
-                  </a:lnTo>
-                  <a:lnTo>
-                    <a:pt x="4368974" y="278291"/>
-                  </a:lnTo>
-                  <a:lnTo>
-                    <a:pt x="4297351" y="264890"/>
-                  </a:lnTo>
-                  <a:lnTo>
-                    <a:pt x="4225729" y="251161"/>
-                  </a:lnTo>
-                  <a:lnTo>
-                    <a:pt x="4154106" y="237097"/>
-                  </a:lnTo>
-                  <a:lnTo>
-                    <a:pt x="4082483" y="222689"/>
-                  </a:lnTo>
-                  <a:lnTo>
-                    <a:pt x="4010861" y="207929"/>
-                  </a:lnTo>
-                  <a:lnTo>
-                    <a:pt x="3939238" y="192809"/>
-                  </a:lnTo>
-                  <a:lnTo>
-                    <a:pt x="3867616" y="177319"/>
-                  </a:lnTo>
-                  <a:lnTo>
-                    <a:pt x="3795993" y="161451"/>
-                  </a:lnTo>
-                  <a:lnTo>
-                    <a:pt x="3724371" y="145194"/>
-                  </a:lnTo>
-                  <a:lnTo>
-                    <a:pt x="3652748" y="128541"/>
-                  </a:lnTo>
-                  <a:lnTo>
-                    <a:pt x="3581126" y="111481"/>
-                  </a:lnTo>
-                  <a:lnTo>
-                    <a:pt x="3509503" y="94004"/>
-                  </a:lnTo>
-                  <a:lnTo>
-                    <a:pt x="3437881" y="76099"/>
-                  </a:lnTo>
-                  <a:lnTo>
-                    <a:pt x="3366258" y="57758"/>
-                  </a:lnTo>
-                  <a:lnTo>
-                    <a:pt x="3294636" y="38968"/>
-                  </a:lnTo>
-                  <a:lnTo>
-                    <a:pt x="3223013" y="19719"/>
+                    <a:pt x="7019007" y="602752"/>
+                  </a:lnTo>
+                  <a:lnTo>
+                    <a:pt x="6947385" y="597268"/>
+                  </a:lnTo>
+                  <a:lnTo>
+                    <a:pt x="6875762" y="591651"/>
+                  </a:lnTo>
+                  <a:lnTo>
+                    <a:pt x="6804139" y="585895"/>
+                  </a:lnTo>
+                  <a:lnTo>
+                    <a:pt x="6732517" y="579999"/>
+                  </a:lnTo>
+                  <a:lnTo>
+                    <a:pt x="6660894" y="573959"/>
+                  </a:lnTo>
+                  <a:lnTo>
+                    <a:pt x="6589272" y="567771"/>
+                  </a:lnTo>
+                  <a:lnTo>
+                    <a:pt x="6517649" y="561431"/>
+                  </a:lnTo>
+                  <a:lnTo>
+                    <a:pt x="6446027" y="554937"/>
+                  </a:lnTo>
+                  <a:lnTo>
+                    <a:pt x="6374404" y="548283"/>
+                  </a:lnTo>
+                  <a:lnTo>
+                    <a:pt x="6302782" y="541467"/>
+                  </a:lnTo>
+                  <a:lnTo>
+                    <a:pt x="6231159" y="534483"/>
+                  </a:lnTo>
+                  <a:lnTo>
+                    <a:pt x="6159537" y="527329"/>
+                  </a:lnTo>
+                  <a:lnTo>
+                    <a:pt x="6087914" y="520000"/>
+                  </a:lnTo>
+                  <a:lnTo>
+                    <a:pt x="6016292" y="512491"/>
+                  </a:lnTo>
+                  <a:lnTo>
+                    <a:pt x="5944669" y="504798"/>
+                  </a:lnTo>
+                  <a:lnTo>
+                    <a:pt x="5873047" y="496918"/>
+                  </a:lnTo>
+                  <a:lnTo>
+                    <a:pt x="5801424" y="488844"/>
+                  </a:lnTo>
+                  <a:lnTo>
+                    <a:pt x="5729802" y="480573"/>
+                  </a:lnTo>
+                  <a:lnTo>
+                    <a:pt x="5658179" y="472099"/>
+                  </a:lnTo>
+                  <a:lnTo>
+                    <a:pt x="5586557" y="463418"/>
+                  </a:lnTo>
+                  <a:lnTo>
+                    <a:pt x="5514934" y="454524"/>
+                  </a:lnTo>
+                  <a:lnTo>
+                    <a:pt x="5443311" y="445413"/>
+                  </a:lnTo>
+                  <a:lnTo>
+                    <a:pt x="5371689" y="436079"/>
+                  </a:lnTo>
+                  <a:lnTo>
+                    <a:pt x="5300066" y="426516"/>
+                  </a:lnTo>
+                  <a:lnTo>
+                    <a:pt x="5228444" y="416720"/>
+                  </a:lnTo>
+                  <a:lnTo>
+                    <a:pt x="5156821" y="406683"/>
+                  </a:lnTo>
+                  <a:lnTo>
+                    <a:pt x="5085199" y="396401"/>
+                  </a:lnTo>
+                  <a:lnTo>
+                    <a:pt x="5013576" y="385867"/>
+                  </a:lnTo>
+                  <a:lnTo>
+                    <a:pt x="4941954" y="375076"/>
+                  </a:lnTo>
+                  <a:lnTo>
+                    <a:pt x="4870331" y="364020"/>
+                  </a:lnTo>
+                  <a:lnTo>
+                    <a:pt x="4798709" y="352694"/>
+                  </a:lnTo>
+                  <a:lnTo>
+                    <a:pt x="4727086" y="341090"/>
+                  </a:lnTo>
+                  <a:lnTo>
+                    <a:pt x="4655464" y="329203"/>
+                  </a:lnTo>
+                  <a:lnTo>
+                    <a:pt x="4583841" y="317025"/>
+                  </a:lnTo>
+                  <a:lnTo>
+                    <a:pt x="4512219" y="304548"/>
+                  </a:lnTo>
+                  <a:lnTo>
+                    <a:pt x="4440596" y="291766"/>
+                  </a:lnTo>
+                  <a:lnTo>
+                    <a:pt x="4368974" y="278672"/>
+                  </a:lnTo>
+                  <a:lnTo>
+                    <a:pt x="4297351" y="265257"/>
+                  </a:lnTo>
+                  <a:lnTo>
+                    <a:pt x="4225729" y="251513"/>
+                  </a:lnTo>
+                  <a:lnTo>
+                    <a:pt x="4154106" y="237434"/>
+                  </a:lnTo>
+                  <a:lnTo>
+                    <a:pt x="4082483" y="223009"/>
+                  </a:lnTo>
+                  <a:lnTo>
+                    <a:pt x="4010861" y="208232"/>
+                  </a:lnTo>
+                  <a:lnTo>
+                    <a:pt x="3939238" y="193093"/>
+                  </a:lnTo>
+                  <a:lnTo>
+                    <a:pt x="3867616" y="177583"/>
+                  </a:lnTo>
+                  <a:lnTo>
+                    <a:pt x="3795993" y="161694"/>
+                  </a:lnTo>
+                  <a:lnTo>
+                    <a:pt x="3724371" y="145416"/>
+                  </a:lnTo>
+                  <a:lnTo>
+                    <a:pt x="3652748" y="128739"/>
+                  </a:lnTo>
+                  <a:lnTo>
+                    <a:pt x="3581126" y="111655"/>
+                  </a:lnTo>
+                  <a:lnTo>
+                    <a:pt x="3509503" y="94152"/>
+                  </a:lnTo>
+                  <a:lnTo>
+                    <a:pt x="3437881" y="76221"/>
+                  </a:lnTo>
+                  <a:lnTo>
+                    <a:pt x="3366258" y="57851"/>
+                  </a:lnTo>
+                  <a:lnTo>
+                    <a:pt x="3294636" y="39032"/>
+                  </a:lnTo>
+                  <a:lnTo>
+                    <a:pt x="3223013" y="19751"/>
                   </a:lnTo>
                   <a:lnTo>
                     <a:pt x="3151391" y="0"/>
                   </a:lnTo>
                   <a:lnTo>
-                    <a:pt x="3079768" y="19872"/>
-                  </a:lnTo>
-                  <a:lnTo>
-                    <a:pt x="3008146" y="45280"/>
-                  </a:lnTo>
-                  <a:lnTo>
-                    <a:pt x="2936523" y="69887"/>
-                  </a:lnTo>
-                  <a:lnTo>
-                    <a:pt x="2864901" y="93720"/>
-                  </a:lnTo>
-                  <a:lnTo>
-                    <a:pt x="2793278" y="116802"/>
-                  </a:lnTo>
-                  <a:lnTo>
-                    <a:pt x="2721655" y="139157"/>
-                  </a:lnTo>
-                  <a:lnTo>
-                    <a:pt x="2650033" y="160809"/>
-                  </a:lnTo>
-                  <a:lnTo>
-                    <a:pt x="2578410" y="181778"/>
-                  </a:lnTo>
-                  <a:lnTo>
-                    <a:pt x="2506788" y="202087"/>
-                  </a:lnTo>
-                  <a:lnTo>
-                    <a:pt x="2435165" y="221757"/>
-                  </a:lnTo>
-                  <a:lnTo>
-                    <a:pt x="2363543" y="240807"/>
-                  </a:lnTo>
-                  <a:lnTo>
-                    <a:pt x="2291920" y="259258"/>
-                  </a:lnTo>
-                  <a:lnTo>
-                    <a:pt x="2220298" y="277127"/>
-                  </a:lnTo>
-                  <a:lnTo>
-                    <a:pt x="2148675" y="294434"/>
-                  </a:lnTo>
-                  <a:lnTo>
-                    <a:pt x="2077053" y="311196"/>
-                  </a:lnTo>
-                  <a:lnTo>
-                    <a:pt x="2005430" y="327430"/>
-                  </a:lnTo>
-                  <a:lnTo>
-                    <a:pt x="1933808" y="343153"/>
-                  </a:lnTo>
-                  <a:lnTo>
-                    <a:pt x="1862185" y="358380"/>
-                  </a:lnTo>
-                  <a:lnTo>
-                    <a:pt x="1790563" y="373128"/>
-                  </a:lnTo>
-                  <a:lnTo>
-                    <a:pt x="1718940" y="387412"/>
-                  </a:lnTo>
-                  <a:lnTo>
-                    <a:pt x="1647318" y="401246"/>
-                  </a:lnTo>
-                  <a:lnTo>
-                    <a:pt x="1575695" y="414644"/>
-                  </a:lnTo>
-                  <a:lnTo>
-                    <a:pt x="1504073" y="427621"/>
-                  </a:lnTo>
-                  <a:lnTo>
-                    <a:pt x="1432450" y="440189"/>
-                  </a:lnTo>
-                  <a:lnTo>
-                    <a:pt x="1360827" y="452361"/>
-                  </a:lnTo>
-                  <a:lnTo>
-                    <a:pt x="1289205" y="464149"/>
-                  </a:lnTo>
-                  <a:lnTo>
-                    <a:pt x="1217582" y="475567"/>
-                  </a:lnTo>
-                  <a:lnTo>
-                    <a:pt x="1145960" y="486625"/>
-                  </a:lnTo>
-                  <a:lnTo>
-                    <a:pt x="1074337" y="497335"/>
-                  </a:lnTo>
-                  <a:lnTo>
-                    <a:pt x="1002715" y="507707"/>
-                  </a:lnTo>
-                  <a:lnTo>
-                    <a:pt x="931092" y="517753"/>
-                  </a:lnTo>
-                  <a:lnTo>
-                    <a:pt x="859470" y="527483"/>
-                  </a:lnTo>
-                  <a:lnTo>
-                    <a:pt x="787847" y="536906"/>
-                  </a:lnTo>
-                  <a:lnTo>
-                    <a:pt x="716225" y="546033"/>
-                  </a:lnTo>
-                  <a:lnTo>
-                    <a:pt x="644602" y="554872"/>
-                  </a:lnTo>
-                  <a:lnTo>
-                    <a:pt x="572980" y="563432"/>
-                  </a:lnTo>
-                  <a:lnTo>
-                    <a:pt x="501357" y="571724"/>
-                  </a:lnTo>
-                  <a:lnTo>
-                    <a:pt x="429735" y="579754"/>
-                  </a:lnTo>
-                  <a:lnTo>
-                    <a:pt x="358112" y="587531"/>
-                  </a:lnTo>
-                  <a:lnTo>
-                    <a:pt x="286490" y="595063"/>
-                  </a:lnTo>
-                  <a:lnTo>
-                    <a:pt x="214867" y="602358"/>
-                  </a:lnTo>
-                  <a:lnTo>
-                    <a:pt x="143245" y="609424"/>
-                  </a:lnTo>
-                  <a:lnTo>
-                    <a:pt x="71622" y="616267"/>
-                  </a:lnTo>
-                  <a:lnTo>
-                    <a:pt x="0" y="622894"/>
+                    <a:pt x="3079768" y="20091"/>
+                  </a:lnTo>
+                  <a:lnTo>
+                    <a:pt x="3008146" y="45562"/>
+                  </a:lnTo>
+                  <a:lnTo>
+                    <a:pt x="2936523" y="70229"/>
+                  </a:lnTo>
+                  <a:lnTo>
+                    <a:pt x="2864901" y="94117"/>
+                  </a:lnTo>
+                  <a:lnTo>
+                    <a:pt x="2793278" y="117251"/>
+                  </a:lnTo>
+                  <a:lnTo>
+                    <a:pt x="2721655" y="139654"/>
+                  </a:lnTo>
+                  <a:lnTo>
+                    <a:pt x="2650033" y="161350"/>
+                  </a:lnTo>
+                  <a:lnTo>
+                    <a:pt x="2578410" y="182361"/>
+                  </a:lnTo>
+                  <a:lnTo>
+                    <a:pt x="2506788" y="202709"/>
+                  </a:lnTo>
+                  <a:lnTo>
+                    <a:pt x="2435165" y="222414"/>
+                  </a:lnTo>
+                  <a:lnTo>
+                    <a:pt x="2363543" y="241497"/>
+                  </a:lnTo>
+                  <a:lnTo>
+                    <a:pt x="2291920" y="259977"/>
+                  </a:lnTo>
+                  <a:lnTo>
+                    <a:pt x="2220298" y="277874"/>
+                  </a:lnTo>
+                  <a:lnTo>
+                    <a:pt x="2148675" y="295206"/>
+                  </a:lnTo>
+                  <a:lnTo>
+                    <a:pt x="2077053" y="311990"/>
+                  </a:lnTo>
+                  <a:lnTo>
+                    <a:pt x="2005430" y="328245"/>
+                  </a:lnTo>
+                  <a:lnTo>
+                    <a:pt x="1933808" y="343986"/>
+                  </a:lnTo>
+                  <a:lnTo>
+                    <a:pt x="1862185" y="359231"/>
+                  </a:lnTo>
+                  <a:lnTo>
+                    <a:pt x="1790563" y="373994"/>
+                  </a:lnTo>
+                  <a:lnTo>
+                    <a:pt x="1718940" y="388291"/>
+                  </a:lnTo>
+                  <a:lnTo>
+                    <a:pt x="1647318" y="402136"/>
+                  </a:lnTo>
+                  <a:lnTo>
+                    <a:pt x="1575695" y="415545"/>
+                  </a:lnTo>
+                  <a:lnTo>
+                    <a:pt x="1504073" y="428530"/>
+                  </a:lnTo>
+                  <a:lnTo>
+                    <a:pt x="1432450" y="441105"/>
+                  </a:lnTo>
+                  <a:lnTo>
+                    <a:pt x="1360827" y="453283"/>
+                  </a:lnTo>
+                  <a:lnTo>
+                    <a:pt x="1289205" y="465076"/>
+                  </a:lnTo>
+                  <a:lnTo>
+                    <a:pt x="1217582" y="476497"/>
+                  </a:lnTo>
+                  <a:lnTo>
+                    <a:pt x="1145960" y="487558"/>
+                  </a:lnTo>
+                  <a:lnTo>
+                    <a:pt x="1074337" y="498269"/>
+                  </a:lnTo>
+                  <a:lnTo>
+                    <a:pt x="1002715" y="508642"/>
+                  </a:lnTo>
+                  <a:lnTo>
+                    <a:pt x="931092" y="518687"/>
+                  </a:lnTo>
+                  <a:lnTo>
+                    <a:pt x="859470" y="528416"/>
+                  </a:lnTo>
+                  <a:lnTo>
+                    <a:pt x="787847" y="537837"/>
+                  </a:lnTo>
+                  <a:lnTo>
+                    <a:pt x="716225" y="546961"/>
+                  </a:lnTo>
+                  <a:lnTo>
+                    <a:pt x="644602" y="555796"/>
+                  </a:lnTo>
+                  <a:lnTo>
+                    <a:pt x="572980" y="564353"/>
+                  </a:lnTo>
+                  <a:lnTo>
+                    <a:pt x="501357" y="572640"/>
+                  </a:lnTo>
+                  <a:lnTo>
+                    <a:pt x="429735" y="580665"/>
+                  </a:lnTo>
+                  <a:lnTo>
+                    <a:pt x="358112" y="588436"/>
+                  </a:lnTo>
+                  <a:lnTo>
+                    <a:pt x="286490" y="595962"/>
+                  </a:lnTo>
+                  <a:lnTo>
+                    <a:pt x="214867" y="603251"/>
+                  </a:lnTo>
+                  <a:lnTo>
+                    <a:pt x="143245" y="610309"/>
+                  </a:lnTo>
+                  <a:lnTo>
+                    <a:pt x="71622" y="617144"/>
+                  </a:lnTo>
+                  <a:lnTo>
+                    <a:pt x="0" y="623764"/>
                   </a:lnTo>
                 </a:path>
               </a:pathLst>
@@ -4226,309 +4226,309 @@
           </p:nvSpPr>
           <p:spPr>
             <a:xfrm>
-              <a:off x="1172049" y="4527246"/>
-              <a:ext cx="7090630" cy="331797"/>
+              <a:off x="1172049" y="4525868"/>
+              <a:ext cx="7090630" cy="333935"/>
             </a:xfrm>
             <a:custGeom>
               <a:avLst/>
               <a:pathLst>
-                <a:path w="7090630" h="331797">
+                <a:path w="7090630" h="333935">
                   <a:moveTo>
-                    <a:pt x="0" y="331797"/>
+                    <a:pt x="0" y="333935"/>
                   </a:moveTo>
                   <a:lnTo>
-                    <a:pt x="71622" y="329050"/>
-                  </a:lnTo>
-                  <a:lnTo>
-                    <a:pt x="143245" y="326292"/>
-                  </a:lnTo>
-                  <a:lnTo>
-                    <a:pt x="214867" y="323523"/>
-                  </a:lnTo>
-                  <a:lnTo>
-                    <a:pt x="286490" y="320743"/>
-                  </a:lnTo>
-                  <a:lnTo>
-                    <a:pt x="358112" y="317952"/>
-                  </a:lnTo>
-                  <a:lnTo>
-                    <a:pt x="429735" y="315150"/>
-                  </a:lnTo>
-                  <a:lnTo>
-                    <a:pt x="501357" y="312337"/>
-                  </a:lnTo>
-                  <a:lnTo>
-                    <a:pt x="572980" y="309513"/>
-                  </a:lnTo>
-                  <a:lnTo>
-                    <a:pt x="644602" y="306677"/>
-                  </a:lnTo>
-                  <a:lnTo>
-                    <a:pt x="716225" y="303831"/>
-                  </a:lnTo>
-                  <a:lnTo>
-                    <a:pt x="787847" y="300974"/>
-                  </a:lnTo>
-                  <a:lnTo>
-                    <a:pt x="859470" y="298105"/>
-                  </a:lnTo>
-                  <a:lnTo>
-                    <a:pt x="931092" y="295225"/>
-                  </a:lnTo>
-                  <a:lnTo>
-                    <a:pt x="1002715" y="292333"/>
-                  </a:lnTo>
-                  <a:lnTo>
-                    <a:pt x="1074337" y="289431"/>
-                  </a:lnTo>
-                  <a:lnTo>
-                    <a:pt x="1145960" y="286517"/>
-                  </a:lnTo>
-                  <a:lnTo>
-                    <a:pt x="1217582" y="283591"/>
-                  </a:lnTo>
-                  <a:lnTo>
-                    <a:pt x="1289205" y="280654"/>
-                  </a:lnTo>
-                  <a:lnTo>
-                    <a:pt x="1360827" y="277705"/>
-                  </a:lnTo>
-                  <a:lnTo>
-                    <a:pt x="1432450" y="274745"/>
-                  </a:lnTo>
-                  <a:lnTo>
-                    <a:pt x="1504073" y="271773"/>
-                  </a:lnTo>
-                  <a:lnTo>
-                    <a:pt x="1575695" y="268789"/>
-                  </a:lnTo>
-                  <a:lnTo>
-                    <a:pt x="1647318" y="265794"/>
-                  </a:lnTo>
-                  <a:lnTo>
-                    <a:pt x="1718940" y="262786"/>
-                  </a:lnTo>
-                  <a:lnTo>
-                    <a:pt x="1790563" y="259767"/>
-                  </a:lnTo>
-                  <a:lnTo>
-                    <a:pt x="1862185" y="256737"/>
-                  </a:lnTo>
-                  <a:lnTo>
-                    <a:pt x="1933808" y="253694"/>
-                  </a:lnTo>
-                  <a:lnTo>
-                    <a:pt x="2005430" y="250639"/>
-                  </a:lnTo>
-                  <a:lnTo>
-                    <a:pt x="2077053" y="247572"/>
-                  </a:lnTo>
-                  <a:lnTo>
-                    <a:pt x="2148675" y="244493"/>
-                  </a:lnTo>
-                  <a:lnTo>
-                    <a:pt x="2220298" y="241402"/>
-                  </a:lnTo>
-                  <a:lnTo>
-                    <a:pt x="2291920" y="238299"/>
-                  </a:lnTo>
-                  <a:lnTo>
-                    <a:pt x="2363543" y="235184"/>
-                  </a:lnTo>
-                  <a:lnTo>
-                    <a:pt x="2435165" y="232056"/>
-                  </a:lnTo>
-                  <a:lnTo>
-                    <a:pt x="2506788" y="228916"/>
-                  </a:lnTo>
-                  <a:lnTo>
-                    <a:pt x="2578410" y="225764"/>
-                  </a:lnTo>
-                  <a:lnTo>
-                    <a:pt x="2650033" y="222599"/>
-                  </a:lnTo>
-                  <a:lnTo>
-                    <a:pt x="2721655" y="219422"/>
-                  </a:lnTo>
-                  <a:lnTo>
-                    <a:pt x="2793278" y="216232"/>
-                  </a:lnTo>
-                  <a:lnTo>
-                    <a:pt x="2864901" y="213030"/>
-                  </a:lnTo>
-                  <a:lnTo>
-                    <a:pt x="2936523" y="209815"/>
-                  </a:lnTo>
-                  <a:lnTo>
-                    <a:pt x="3008146" y="206588"/>
-                  </a:lnTo>
-                  <a:lnTo>
-                    <a:pt x="3079768" y="203348"/>
-                  </a:lnTo>
-                  <a:lnTo>
-                    <a:pt x="3151391" y="200095"/>
-                  </a:lnTo>
-                  <a:lnTo>
-                    <a:pt x="3223013" y="196829"/>
-                  </a:lnTo>
-                  <a:lnTo>
-                    <a:pt x="3294636" y="193550"/>
-                  </a:lnTo>
-                  <a:lnTo>
-                    <a:pt x="3366258" y="190259"/>
-                  </a:lnTo>
-                  <a:lnTo>
-                    <a:pt x="3437881" y="186954"/>
-                  </a:lnTo>
-                  <a:lnTo>
-                    <a:pt x="3509503" y="183637"/>
-                  </a:lnTo>
-                  <a:lnTo>
-                    <a:pt x="3581126" y="180307"/>
-                  </a:lnTo>
-                  <a:lnTo>
-                    <a:pt x="3652748" y="176963"/>
-                  </a:lnTo>
-                  <a:lnTo>
-                    <a:pt x="3724371" y="173606"/>
-                  </a:lnTo>
-                  <a:lnTo>
-                    <a:pt x="3795993" y="170236"/>
-                  </a:lnTo>
-                  <a:lnTo>
-                    <a:pt x="3867616" y="166853"/>
-                  </a:lnTo>
-                  <a:lnTo>
-                    <a:pt x="3939238" y="163457"/>
-                  </a:lnTo>
-                  <a:lnTo>
-                    <a:pt x="4010861" y="160047"/>
-                  </a:lnTo>
-                  <a:lnTo>
-                    <a:pt x="4082483" y="156623"/>
-                  </a:lnTo>
-                  <a:lnTo>
-                    <a:pt x="4154106" y="153187"/>
-                  </a:lnTo>
-                  <a:lnTo>
-                    <a:pt x="4225729" y="149736"/>
-                  </a:lnTo>
-                  <a:lnTo>
-                    <a:pt x="4297351" y="146272"/>
-                  </a:lnTo>
-                  <a:lnTo>
-                    <a:pt x="4368974" y="142795"/>
-                  </a:lnTo>
-                  <a:lnTo>
-                    <a:pt x="4440596" y="139304"/>
-                  </a:lnTo>
-                  <a:lnTo>
-                    <a:pt x="4512219" y="135799"/>
-                  </a:lnTo>
-                  <a:lnTo>
-                    <a:pt x="4583841" y="132280"/>
-                  </a:lnTo>
-                  <a:lnTo>
-                    <a:pt x="4655464" y="128747"/>
-                  </a:lnTo>
-                  <a:lnTo>
-                    <a:pt x="4727086" y="125201"/>
-                  </a:lnTo>
-                  <a:lnTo>
-                    <a:pt x="4798709" y="121641"/>
-                  </a:lnTo>
-                  <a:lnTo>
-                    <a:pt x="4870331" y="118066"/>
-                  </a:lnTo>
-                  <a:lnTo>
-                    <a:pt x="4941954" y="114478"/>
-                  </a:lnTo>
-                  <a:lnTo>
-                    <a:pt x="5013576" y="110875"/>
-                  </a:lnTo>
-                  <a:lnTo>
-                    <a:pt x="5085199" y="107258"/>
-                  </a:lnTo>
-                  <a:lnTo>
-                    <a:pt x="5156821" y="103627"/>
-                  </a:lnTo>
-                  <a:lnTo>
-                    <a:pt x="5228444" y="99982"/>
-                  </a:lnTo>
-                  <a:lnTo>
-                    <a:pt x="5300066" y="96322"/>
-                  </a:lnTo>
-                  <a:lnTo>
-                    <a:pt x="5371689" y="92648"/>
-                  </a:lnTo>
-                  <a:lnTo>
-                    <a:pt x="5443311" y="88960"/>
-                  </a:lnTo>
-                  <a:lnTo>
-                    <a:pt x="5514934" y="85257"/>
-                  </a:lnTo>
-                  <a:lnTo>
-                    <a:pt x="5586557" y="81539"/>
-                  </a:lnTo>
-                  <a:lnTo>
-                    <a:pt x="5658179" y="77807"/>
-                  </a:lnTo>
-                  <a:lnTo>
-                    <a:pt x="5729802" y="74060"/>
-                  </a:lnTo>
-                  <a:lnTo>
-                    <a:pt x="5801424" y="70298"/>
-                  </a:lnTo>
-                  <a:lnTo>
-                    <a:pt x="5873047" y="66522"/>
-                  </a:lnTo>
-                  <a:lnTo>
-                    <a:pt x="5944669" y="62730"/>
-                  </a:lnTo>
-                  <a:lnTo>
-                    <a:pt x="6016292" y="58924"/>
-                  </a:lnTo>
-                  <a:lnTo>
-                    <a:pt x="6087914" y="55103"/>
-                  </a:lnTo>
-                  <a:lnTo>
-                    <a:pt x="6159537" y="51267"/>
-                  </a:lnTo>
-                  <a:lnTo>
-                    <a:pt x="6231159" y="47415"/>
-                  </a:lnTo>
-                  <a:lnTo>
-                    <a:pt x="6302782" y="43549"/>
-                  </a:lnTo>
-                  <a:lnTo>
-                    <a:pt x="6374404" y="39667"/>
-                  </a:lnTo>
-                  <a:lnTo>
-                    <a:pt x="6446027" y="35770"/>
-                  </a:lnTo>
-                  <a:lnTo>
-                    <a:pt x="6517649" y="31858"/>
-                  </a:lnTo>
-                  <a:lnTo>
-                    <a:pt x="6589272" y="27930"/>
-                  </a:lnTo>
-                  <a:lnTo>
-                    <a:pt x="6660894" y="23987"/>
-                  </a:lnTo>
-                  <a:lnTo>
-                    <a:pt x="6732517" y="20028"/>
-                  </a:lnTo>
-                  <a:lnTo>
-                    <a:pt x="6804139" y="16054"/>
-                  </a:lnTo>
-                  <a:lnTo>
-                    <a:pt x="6875762" y="12064"/>
-                  </a:lnTo>
-                  <a:lnTo>
-                    <a:pt x="6947385" y="8058"/>
-                  </a:lnTo>
-                  <a:lnTo>
-                    <a:pt x="7019007" y="4037"/>
+                    <a:pt x="71622" y="331173"/>
+                  </a:lnTo>
+                  <a:lnTo>
+                    <a:pt x="143245" y="328400"/>
+                  </a:lnTo>
+                  <a:lnTo>
+                    <a:pt x="214867" y="325617"/>
+                  </a:lnTo>
+                  <a:lnTo>
+                    <a:pt x="286490" y="322822"/>
+                  </a:lnTo>
+                  <a:lnTo>
+                    <a:pt x="358112" y="320017"/>
+                  </a:lnTo>
+                  <a:lnTo>
+                    <a:pt x="429735" y="317200"/>
+                  </a:lnTo>
+                  <a:lnTo>
+                    <a:pt x="501357" y="314372"/>
+                  </a:lnTo>
+                  <a:lnTo>
+                    <a:pt x="572980" y="311533"/>
+                  </a:lnTo>
+                  <a:lnTo>
+                    <a:pt x="644602" y="308683"/>
+                  </a:lnTo>
+                  <a:lnTo>
+                    <a:pt x="716225" y="305821"/>
+                  </a:lnTo>
+                  <a:lnTo>
+                    <a:pt x="787847" y="302948"/>
+                  </a:lnTo>
+                  <a:lnTo>
+                    <a:pt x="859470" y="300064"/>
+                  </a:lnTo>
+                  <a:lnTo>
+                    <a:pt x="931092" y="297168"/>
+                  </a:lnTo>
+                  <a:lnTo>
+                    <a:pt x="1002715" y="294261"/>
+                  </a:lnTo>
+                  <a:lnTo>
+                    <a:pt x="1074337" y="291342"/>
+                  </a:lnTo>
+                  <a:lnTo>
+                    <a:pt x="1145960" y="288412"/>
+                  </a:lnTo>
+                  <a:lnTo>
+                    <a:pt x="1217582" y="285470"/>
+                  </a:lnTo>
+                  <a:lnTo>
+                    <a:pt x="1289205" y="282516"/>
+                  </a:lnTo>
+                  <a:lnTo>
+                    <a:pt x="1360827" y="279551"/>
+                  </a:lnTo>
+                  <a:lnTo>
+                    <a:pt x="1432450" y="276574"/>
+                  </a:lnTo>
+                  <a:lnTo>
+                    <a:pt x="1504073" y="273585"/>
+                  </a:lnTo>
+                  <a:lnTo>
+                    <a:pt x="1575695" y="270585"/>
+                  </a:lnTo>
+                  <a:lnTo>
+                    <a:pt x="1647318" y="267572"/>
+                  </a:lnTo>
+                  <a:lnTo>
+                    <a:pt x="1718940" y="264548"/>
+                  </a:lnTo>
+                  <a:lnTo>
+                    <a:pt x="1790563" y="261512"/>
+                  </a:lnTo>
+                  <a:lnTo>
+                    <a:pt x="1862185" y="258463"/>
+                  </a:lnTo>
+                  <a:lnTo>
+                    <a:pt x="1933808" y="255403"/>
+                  </a:lnTo>
+                  <a:lnTo>
+                    <a:pt x="2005430" y="252330"/>
+                  </a:lnTo>
+                  <a:lnTo>
+                    <a:pt x="2077053" y="249245"/>
+                  </a:lnTo>
+                  <a:lnTo>
+                    <a:pt x="2148675" y="246149"/>
+                  </a:lnTo>
+                  <a:lnTo>
+                    <a:pt x="2220298" y="243039"/>
+                  </a:lnTo>
+                  <a:lnTo>
+                    <a:pt x="2291920" y="239918"/>
+                  </a:lnTo>
+                  <a:lnTo>
+                    <a:pt x="2363543" y="236784"/>
+                  </a:lnTo>
+                  <a:lnTo>
+                    <a:pt x="2435165" y="233638"/>
+                  </a:lnTo>
+                  <a:lnTo>
+                    <a:pt x="2506788" y="230479"/>
+                  </a:lnTo>
+                  <a:lnTo>
+                    <a:pt x="2578410" y="227308"/>
+                  </a:lnTo>
+                  <a:lnTo>
+                    <a:pt x="2650033" y="224124"/>
+                  </a:lnTo>
+                  <a:lnTo>
+                    <a:pt x="2721655" y="220927"/>
+                  </a:lnTo>
+                  <a:lnTo>
+                    <a:pt x="2793278" y="217718"/>
+                  </a:lnTo>
+                  <a:lnTo>
+                    <a:pt x="2864901" y="214496"/>
+                  </a:lnTo>
+                  <a:lnTo>
+                    <a:pt x="2936523" y="211262"/>
+                  </a:lnTo>
+                  <a:lnTo>
+                    <a:pt x="3008146" y="208014"/>
+                  </a:lnTo>
+                  <a:lnTo>
+                    <a:pt x="3079768" y="204754"/>
+                  </a:lnTo>
+                  <a:lnTo>
+                    <a:pt x="3151391" y="201481"/>
+                  </a:lnTo>
+                  <a:lnTo>
+                    <a:pt x="3223013" y="198195"/>
+                  </a:lnTo>
+                  <a:lnTo>
+                    <a:pt x="3294636" y="194896"/>
+                  </a:lnTo>
+                  <a:lnTo>
+                    <a:pt x="3366258" y="191584"/>
+                  </a:lnTo>
+                  <a:lnTo>
+                    <a:pt x="3437881" y="188258"/>
+                  </a:lnTo>
+                  <a:lnTo>
+                    <a:pt x="3509503" y="184920"/>
+                  </a:lnTo>
+                  <a:lnTo>
+                    <a:pt x="3581126" y="181568"/>
+                  </a:lnTo>
+                  <a:lnTo>
+                    <a:pt x="3652748" y="178203"/>
+                  </a:lnTo>
+                  <a:lnTo>
+                    <a:pt x="3724371" y="174825"/>
+                  </a:lnTo>
+                  <a:lnTo>
+                    <a:pt x="3795993" y="171433"/>
+                  </a:lnTo>
+                  <a:lnTo>
+                    <a:pt x="3867616" y="168028"/>
+                  </a:lnTo>
+                  <a:lnTo>
+                    <a:pt x="3939238" y="164610"/>
+                  </a:lnTo>
+                  <a:lnTo>
+                    <a:pt x="4010861" y="161178"/>
+                  </a:lnTo>
+                  <a:lnTo>
+                    <a:pt x="4082483" y="157732"/>
+                  </a:lnTo>
+                  <a:lnTo>
+                    <a:pt x="4154106" y="154273"/>
+                  </a:lnTo>
+                  <a:lnTo>
+                    <a:pt x="4225729" y="150800"/>
+                  </a:lnTo>
+                  <a:lnTo>
+                    <a:pt x="4297351" y="147313"/>
+                  </a:lnTo>
+                  <a:lnTo>
+                    <a:pt x="4368974" y="143812"/>
+                  </a:lnTo>
+                  <a:lnTo>
+                    <a:pt x="4440596" y="140298"/>
+                  </a:lnTo>
+                  <a:lnTo>
+                    <a:pt x="4512219" y="136770"/>
+                  </a:lnTo>
+                  <a:lnTo>
+                    <a:pt x="4583841" y="133227"/>
+                  </a:lnTo>
+                  <a:lnTo>
+                    <a:pt x="4655464" y="129671"/>
+                  </a:lnTo>
+                  <a:lnTo>
+                    <a:pt x="4727086" y="126101"/>
+                  </a:lnTo>
+                  <a:lnTo>
+                    <a:pt x="4798709" y="122516"/>
+                  </a:lnTo>
+                  <a:lnTo>
+                    <a:pt x="4870331" y="118917"/>
+                  </a:lnTo>
+                  <a:lnTo>
+                    <a:pt x="4941954" y="115304"/>
+                  </a:lnTo>
+                  <a:lnTo>
+                    <a:pt x="5013576" y="111677"/>
+                  </a:lnTo>
+                  <a:lnTo>
+                    <a:pt x="5085199" y="108035"/>
+                  </a:lnTo>
+                  <a:lnTo>
+                    <a:pt x="5156821" y="104379"/>
+                  </a:lnTo>
+                  <a:lnTo>
+                    <a:pt x="5228444" y="100708"/>
+                  </a:lnTo>
+                  <a:lnTo>
+                    <a:pt x="5300066" y="97023"/>
+                  </a:lnTo>
+                  <a:lnTo>
+                    <a:pt x="5371689" y="93324"/>
+                  </a:lnTo>
+                  <a:lnTo>
+                    <a:pt x="5443311" y="89609"/>
+                  </a:lnTo>
+                  <a:lnTo>
+                    <a:pt x="5514934" y="85880"/>
+                  </a:lnTo>
+                  <a:lnTo>
+                    <a:pt x="5586557" y="82136"/>
+                  </a:lnTo>
+                  <a:lnTo>
+                    <a:pt x="5658179" y="78378"/>
+                  </a:lnTo>
+                  <a:lnTo>
+                    <a:pt x="5729802" y="74604"/>
+                  </a:lnTo>
+                  <a:lnTo>
+                    <a:pt x="5801424" y="70816"/>
+                  </a:lnTo>
+                  <a:lnTo>
+                    <a:pt x="5873047" y="67012"/>
+                  </a:lnTo>
+                  <a:lnTo>
+                    <a:pt x="5944669" y="63194"/>
+                  </a:lnTo>
+                  <a:lnTo>
+                    <a:pt x="6016292" y="59360"/>
+                  </a:lnTo>
+                  <a:lnTo>
+                    <a:pt x="6087914" y="55511"/>
+                  </a:lnTo>
+                  <a:lnTo>
+                    <a:pt x="6159537" y="51647"/>
+                  </a:lnTo>
+                  <a:lnTo>
+                    <a:pt x="6231159" y="47768"/>
+                  </a:lnTo>
+                  <a:lnTo>
+                    <a:pt x="6302782" y="43873"/>
+                  </a:lnTo>
+                  <a:lnTo>
+                    <a:pt x="6374404" y="39963"/>
+                  </a:lnTo>
+                  <a:lnTo>
+                    <a:pt x="6446027" y="36037"/>
+                  </a:lnTo>
+                  <a:lnTo>
+                    <a:pt x="6517649" y="32096"/>
+                  </a:lnTo>
+                  <a:lnTo>
+                    <a:pt x="6589272" y="28139"/>
+                  </a:lnTo>
+                  <a:lnTo>
+                    <a:pt x="6660894" y="24167"/>
+                  </a:lnTo>
+                  <a:lnTo>
+                    <a:pt x="6732517" y="20179"/>
+                  </a:lnTo>
+                  <a:lnTo>
+                    <a:pt x="6804139" y="16175"/>
+                  </a:lnTo>
+                  <a:lnTo>
+                    <a:pt x="6875762" y="12155"/>
+                  </a:lnTo>
+                  <a:lnTo>
+                    <a:pt x="6947385" y="8119"/>
+                  </a:lnTo>
+                  <a:lnTo>
+                    <a:pt x="7019007" y="4067"/>
                   </a:lnTo>
                   <a:lnTo>
                     <a:pt x="7090630" y="0"/>
@@ -4603,7 +4603,7 @@
           </p:nvSpPr>
           <p:spPr>
             <a:xfrm>
-              <a:off x="4313661" y="2073503"/>
+              <a:off x="4313914" y="2073503"/>
               <a:ext cx="0" cy="3649639"/>
             </a:xfrm>
             <a:custGeom>
@@ -4876,7 +4876,7 @@
           </p:nvSpPr>
           <p:spPr>
             <a:xfrm>
-              <a:off x="2280620" y="5785772"/>
+              <a:off x="2281218" y="5785772"/>
               <a:ext cx="161574" cy="80101"/>
             </a:xfrm>
             <a:prstGeom prst="rect">
@@ -4922,7 +4922,7 @@
           </p:nvSpPr>
           <p:spPr>
             <a:xfrm>
-              <a:off x="4204872" y="5785772"/>
+              <a:off x="4203472" y="5785772"/>
               <a:ext cx="62179" cy="80101"/>
             </a:xfrm>
             <a:prstGeom prst="rect">
@@ -4968,7 +4968,7 @@
           </p:nvSpPr>
           <p:spPr>
             <a:xfrm>
-              <a:off x="6048338" y="5785772"/>
+              <a:off x="6044938" y="5785772"/>
               <a:ext cx="124358" cy="80101"/>
             </a:xfrm>
             <a:prstGeom prst="rect">
@@ -5014,7 +5014,7 @@
           </p:nvSpPr>
           <p:spPr>
             <a:xfrm>
-              <a:off x="7922893" y="5785772"/>
+              <a:off x="7917494" y="5785772"/>
               <a:ext cx="124358" cy="80101"/>
             </a:xfrm>
             <a:prstGeom prst="rect">
@@ -5185,7 +5185,7 @@
                   <a:latin typeface="Helvetica"/>
                   <a:cs typeface="Helvetica"/>
                 </a:rPr>
-                <a:t>subHR per 10 % decline: 0.95 (0.66-1.37), p = 0.784  |  per IQR decline (Δ = 25.8 %): 0.88 (0.34-2.26)  |  IQR: [-10.7, 15.1] %</a:t>
+                <a:t>subHR per 10 % decline: 0.95 (0.66-1.37), p = 0.783  |  per IQR decline (Δ = 25.8 %): 0.88 (0.34-2.26)  |  IQR: [-10.6, 15.2] %</a:t>
               </a:r>
             </a:p>
           </p:txBody>
